--- a/IA en Nuestros Procesos — CDCC.pptx
+++ b/IA en Nuestros Procesos — CDCC.pptx
@@ -1356,8 +1356,8 @@
         </p:nvSpPr>
         <p:spPr>
           <a:xfrm>
-            <a:off x="812800" y="1912739"/>
-            <a:ext cx="10883392" cy="238720"/>
+            <a:off x="812800" y="1913185"/>
+            <a:ext cx="10883392" cy="238760"/>
           </a:xfrm>
           <a:prstGeom prst="rect">
             <a:avLst/>
@@ -1402,13 +1402,13 @@
         </p:nvPicPr>
         <p:blipFill>
           <a:blip r:embed="rId1"/>
-          <a:srcRect l="0" r="0" t="0" b="0"/>
+          <a:srcRect l="-1136" r="-1136" t="0" b="0"/>
           <a:stretch/>
         </p:blipFill>
         <p:spPr>
           <a:xfrm>
-            <a:off x="812800" y="2329259"/>
-            <a:ext cx="762000" cy="50800"/>
+            <a:off x="812800" y="2329744"/>
+            <a:ext cx="762000" cy="49671"/>
           </a:xfrm>
           <a:prstGeom prst="rect">
             <a:avLst/>
@@ -1423,8 +1423,8 @@
         </p:nvSpPr>
         <p:spPr>
           <a:xfrm>
-            <a:off x="812800" y="2583259"/>
-            <a:ext cx="9810750" cy="1412081"/>
+            <a:off x="812800" y="2582616"/>
+            <a:ext cx="9810750" cy="1412240"/>
           </a:xfrm>
           <a:prstGeom prst="rect">
             <a:avLst/>
@@ -1467,8 +1467,8 @@
         </p:nvSpPr>
         <p:spPr>
           <a:xfrm>
-            <a:off x="812800" y="4173141"/>
-            <a:ext cx="8175625" cy="594320"/>
+            <a:off x="812800" y="4172656"/>
+            <a:ext cx="8175625" cy="594360"/>
           </a:xfrm>
           <a:prstGeom prst="rect">
             <a:avLst/>
@@ -1511,8 +1511,8 @@
         </p:nvSpPr>
         <p:spPr>
           <a:xfrm>
-            <a:off x="812800" y="6238280"/>
-            <a:ext cx="2445023" cy="238720"/>
+            <a:off x="812800" y="6238240"/>
+            <a:ext cx="2392224" cy="238760"/>
           </a:xfrm>
           <a:prstGeom prst="rect">
             <a:avLst/>
@@ -1588,7 +1588,7 @@
         <p:spPr>
           <a:xfrm>
             <a:off x="812800" y="812800"/>
-            <a:ext cx="10883392" cy="238720"/>
+            <a:ext cx="10883392" cy="238760"/>
           </a:xfrm>
           <a:prstGeom prst="rect">
             <a:avLst/>
@@ -1631,7 +1631,7 @@
         </p:nvSpPr>
         <p:spPr>
           <a:xfrm>
-            <a:off x="812800" y="1229320"/>
+            <a:off x="812800" y="1229360"/>
             <a:ext cx="10137775" cy="901700"/>
           </a:xfrm>
           <a:prstGeom prst="rect">
@@ -1675,8 +1675,8 @@
         </p:nvSpPr>
         <p:spPr>
           <a:xfrm>
-            <a:off x="812800" y="2308820"/>
-            <a:ext cx="9810750" cy="487561"/>
+            <a:off x="812800" y="2308860"/>
+            <a:ext cx="9810750" cy="487680"/>
           </a:xfrm>
           <a:prstGeom prst="rect">
             <a:avLst/>
@@ -1719,12 +1719,12 @@
         </p:nvSpPr>
         <p:spPr>
           <a:xfrm>
-            <a:off x="815975" y="2977356"/>
-            <a:ext cx="5175250" cy="1728391"/>
+            <a:off x="815975" y="2977515"/>
+            <a:ext cx="5175250" cy="1724801"/>
           </a:xfrm>
           <a:prstGeom prst="roundRect">
             <a:avLst>
-              <a:gd name="adj" fmla="val 7164"/>
+              <a:gd name="adj" fmla="val 7179"/>
             </a:avLst>
           </a:prstGeom>
           <a:solidFill>
@@ -1753,7 +1753,7 @@
         </p:nvSpPr>
         <p:spPr>
           <a:xfrm>
-            <a:off x="1047750" y="3209131"/>
+            <a:off x="1045916" y="3207456"/>
             <a:ext cx="406400" cy="406400"/>
           </a:xfrm>
           <a:prstGeom prst="roundRect">
@@ -1782,7 +1782,7 @@
         </p:blipFill>
         <p:spPr>
           <a:xfrm>
-            <a:off x="1149350" y="3310731"/>
+            <a:off x="1147516" y="3309056"/>
             <a:ext cx="203200" cy="203200"/>
           </a:xfrm>
           <a:prstGeom prst="rect">
@@ -1798,8 +1798,8 @@
         </p:nvSpPr>
         <p:spPr>
           <a:xfrm>
-            <a:off x="1047750" y="3717131"/>
-            <a:ext cx="4853051" cy="254000"/>
+            <a:off x="1045916" y="3715456"/>
+            <a:ext cx="4856830" cy="254000"/>
           </a:xfrm>
           <a:prstGeom prst="rect">
             <a:avLst/>
@@ -1842,8 +1842,8 @@
         </p:nvSpPr>
         <p:spPr>
           <a:xfrm>
-            <a:off x="1047750" y="4047331"/>
-            <a:ext cx="4853051" cy="452041"/>
+            <a:off x="1045916" y="4045656"/>
+            <a:ext cx="4856830" cy="452120"/>
           </a:xfrm>
           <a:prstGeom prst="rect">
             <a:avLst/>
@@ -1886,12 +1886,12 @@
         </p:nvSpPr>
         <p:spPr>
           <a:xfrm>
-            <a:off x="6200775" y="2977356"/>
-            <a:ext cx="5175250" cy="1728391"/>
+            <a:off x="6200775" y="2977515"/>
+            <a:ext cx="5175250" cy="1724801"/>
           </a:xfrm>
           <a:prstGeom prst="roundRect">
             <a:avLst>
-              <a:gd name="adj" fmla="val 7164"/>
+              <a:gd name="adj" fmla="val 7179"/>
             </a:avLst>
           </a:prstGeom>
           <a:solidFill>
@@ -1920,7 +1920,7 @@
         </p:nvSpPr>
         <p:spPr>
           <a:xfrm>
-            <a:off x="6432550" y="3209131"/>
+            <a:off x="6430716" y="3207456"/>
             <a:ext cx="406400" cy="406400"/>
           </a:xfrm>
           <a:prstGeom prst="roundRect">
@@ -1949,7 +1949,7 @@
         </p:blipFill>
         <p:spPr>
           <a:xfrm>
-            <a:off x="6534150" y="3310731"/>
+            <a:off x="6532316" y="3309056"/>
             <a:ext cx="203200" cy="203200"/>
           </a:xfrm>
           <a:prstGeom prst="rect">
@@ -1965,8 +1965,8 @@
         </p:nvSpPr>
         <p:spPr>
           <a:xfrm>
-            <a:off x="6432550" y="3717131"/>
-            <a:ext cx="4853051" cy="254000"/>
+            <a:off x="6430716" y="3715456"/>
+            <a:ext cx="4856830" cy="254000"/>
           </a:xfrm>
           <a:prstGeom prst="rect">
             <a:avLst/>
@@ -2009,8 +2009,8 @@
         </p:nvSpPr>
         <p:spPr>
           <a:xfrm>
-            <a:off x="6432550" y="4047331"/>
-            <a:ext cx="4853051" cy="452041"/>
+            <a:off x="6430716" y="4045656"/>
+            <a:ext cx="4856830" cy="452120"/>
           </a:xfrm>
           <a:prstGeom prst="rect">
             <a:avLst/>
@@ -2053,8 +2053,8 @@
         </p:nvSpPr>
         <p:spPr>
           <a:xfrm>
-            <a:off x="812800" y="4912122"/>
-            <a:ext cx="10883392" cy="238720"/>
+            <a:off x="812800" y="4908691"/>
+            <a:ext cx="10883392" cy="238760"/>
           </a:xfrm>
           <a:prstGeom prst="rect">
             <a:avLst/>
@@ -2097,8 +2097,8 @@
         </p:nvSpPr>
         <p:spPr>
           <a:xfrm>
-            <a:off x="812800" y="5227042"/>
-            <a:ext cx="727273" cy="365720"/>
+            <a:off x="812800" y="5223652"/>
+            <a:ext cx="712294" cy="365760"/>
           </a:xfrm>
           <a:prstGeom prst="roundRect">
             <a:avLst>
@@ -2119,8 +2119,8 @@
         </p:nvSpPr>
         <p:spPr>
           <a:xfrm>
-            <a:off x="990600" y="5303242"/>
-            <a:ext cx="422473" cy="238720"/>
+            <a:off x="990600" y="5299852"/>
+            <a:ext cx="407494" cy="238760"/>
           </a:xfrm>
           <a:prstGeom prst="rect">
             <a:avLst/>
@@ -2163,8 +2163,8 @@
         </p:nvSpPr>
         <p:spPr>
           <a:xfrm>
-            <a:off x="1641673" y="5227042"/>
-            <a:ext cx="729456" cy="365720"/>
+            <a:off x="1626694" y="5223652"/>
+            <a:ext cx="716915" cy="365760"/>
           </a:xfrm>
           <a:prstGeom prst="roundRect">
             <a:avLst>
@@ -2185,8 +2185,8 @@
         </p:nvSpPr>
         <p:spPr>
           <a:xfrm>
-            <a:off x="1819473" y="5303242"/>
-            <a:ext cx="424656" cy="238720"/>
+            <a:off x="1804494" y="5299852"/>
+            <a:ext cx="412115" cy="238760"/>
           </a:xfrm>
           <a:prstGeom prst="rect">
             <a:avLst/>
@@ -2229,8 +2229,8 @@
         </p:nvSpPr>
         <p:spPr>
           <a:xfrm>
-            <a:off x="2472730" y="5227042"/>
-            <a:ext cx="1158875" cy="365720"/>
+            <a:off x="2445209" y="5223652"/>
+            <a:ext cx="1144199" cy="365760"/>
           </a:xfrm>
           <a:prstGeom prst="roundRect">
             <a:avLst>
@@ -2251,8 +2251,8 @@
         </p:nvSpPr>
         <p:spPr>
           <a:xfrm>
-            <a:off x="2650530" y="5303242"/>
-            <a:ext cx="854075" cy="238720"/>
+            <a:off x="2623009" y="5299852"/>
+            <a:ext cx="839399" cy="238760"/>
           </a:xfrm>
           <a:prstGeom prst="rect">
             <a:avLst/>
@@ -2295,8 +2295,8 @@
         </p:nvSpPr>
         <p:spPr>
           <a:xfrm>
-            <a:off x="3733205" y="5227042"/>
-            <a:ext cx="1212751" cy="365720"/>
+            <a:off x="3691008" y="5223652"/>
+            <a:ext cx="1197081" cy="365760"/>
           </a:xfrm>
           <a:prstGeom prst="roundRect">
             <a:avLst>
@@ -2317,8 +2317,8 @@
         </p:nvSpPr>
         <p:spPr>
           <a:xfrm>
-            <a:off x="3911005" y="5303242"/>
-            <a:ext cx="907951" cy="238720"/>
+            <a:off x="3868808" y="5299852"/>
+            <a:ext cx="892281" cy="238760"/>
           </a:xfrm>
           <a:prstGeom prst="rect">
             <a:avLst/>
@@ -2361,8 +2361,8 @@
         </p:nvSpPr>
         <p:spPr>
           <a:xfrm>
-            <a:off x="5047555" y="5227042"/>
-            <a:ext cx="1418233" cy="365720"/>
+            <a:off x="4989689" y="5223652"/>
+            <a:ext cx="1398905" cy="365760"/>
           </a:xfrm>
           <a:prstGeom prst="roundRect">
             <a:avLst>
@@ -2383,8 +2383,8 @@
         </p:nvSpPr>
         <p:spPr>
           <a:xfrm>
-            <a:off x="5225355" y="5303242"/>
-            <a:ext cx="1113433" cy="238720"/>
+            <a:off x="5167489" y="5299852"/>
+            <a:ext cx="1094105" cy="238760"/>
           </a:xfrm>
           <a:prstGeom prst="rect">
             <a:avLst/>
@@ -2427,8 +2427,8 @@
         </p:nvSpPr>
         <p:spPr>
           <a:xfrm>
-            <a:off x="812800" y="6238280"/>
-            <a:ext cx="3689864" cy="238720"/>
+            <a:off x="812800" y="6238241"/>
+            <a:ext cx="3648000" cy="238760"/>
           </a:xfrm>
           <a:prstGeom prst="rect">
             <a:avLst/>
@@ -2471,8 +2471,8 @@
         </p:nvSpPr>
         <p:spPr>
           <a:xfrm>
-            <a:off x="11065966" y="6238280"/>
-            <a:ext cx="364034" cy="238720"/>
+            <a:off x="11069391" y="6238241"/>
+            <a:ext cx="360609" cy="238760"/>
           </a:xfrm>
           <a:prstGeom prst="rect">
             <a:avLst/>
@@ -2548,7 +2548,7 @@
         <p:spPr>
           <a:xfrm>
             <a:off x="812800" y="812800"/>
-            <a:ext cx="10883392" cy="238720"/>
+            <a:ext cx="10883392" cy="238760"/>
           </a:xfrm>
           <a:prstGeom prst="rect">
             <a:avLst/>
@@ -2591,8 +2591,8 @@
         </p:nvSpPr>
         <p:spPr>
           <a:xfrm>
-            <a:off x="812800" y="1203920"/>
-            <a:ext cx="10464800" cy="434280"/>
+            <a:off x="812800" y="1203961"/>
+            <a:ext cx="10464800" cy="434340"/>
           </a:xfrm>
           <a:prstGeom prst="rect">
             <a:avLst/>
@@ -2635,8 +2635,8 @@
         </p:nvSpPr>
         <p:spPr>
           <a:xfrm>
-            <a:off x="812800" y="1790601"/>
-            <a:ext cx="9810750" cy="487561"/>
+            <a:off x="812800" y="1790700"/>
+            <a:ext cx="9810750" cy="256540"/>
           </a:xfrm>
           <a:prstGeom prst="rect">
             <a:avLst/>
@@ -2679,12 +2679,12 @@
         </p:nvSpPr>
         <p:spPr>
           <a:xfrm>
-            <a:off x="815975" y="2433737"/>
-            <a:ext cx="10560050" cy="2673152"/>
+            <a:off x="815975" y="2202816"/>
+            <a:ext cx="10560050" cy="2662343"/>
           </a:xfrm>
           <a:prstGeom prst="roundRect">
             <a:avLst>
-              <a:gd name="adj" fmla="val 5582"/>
+              <a:gd name="adj" fmla="val 5605"/>
             </a:avLst>
           </a:prstGeom>
           <a:solidFill>
@@ -2706,12 +2706,12 @@
         </p:nvSpPr>
         <p:spPr>
           <a:xfrm>
-            <a:off x="1076325" y="2694087"/>
-            <a:ext cx="10039350" cy="676870"/>
+            <a:off x="1074491" y="2461330"/>
+            <a:ext cx="10043019" cy="673241"/>
           </a:xfrm>
           <a:prstGeom prst="roundRect">
             <a:avLst>
-              <a:gd name="adj" fmla="val 14541"/>
+              <a:gd name="adj" fmla="val 14620"/>
             </a:avLst>
           </a:prstGeom>
           <a:solidFill>
@@ -2740,7 +2740,7 @@
         </p:blipFill>
         <p:spPr>
           <a:xfrm>
-            <a:off x="1282700" y="2943523"/>
+            <a:off x="1279031" y="2709052"/>
             <a:ext cx="177800" cy="177800"/>
           </a:xfrm>
           <a:prstGeom prst="rect">
@@ -2756,8 +2756,8 @@
         </p:nvSpPr>
         <p:spPr>
           <a:xfrm>
-            <a:off x="1562100" y="2916932"/>
-            <a:ext cx="2135780" cy="256480"/>
+            <a:off x="1558431" y="2682382"/>
+            <a:ext cx="2100409" cy="256540"/>
           </a:xfrm>
           <a:prstGeom prst="rect">
             <a:avLst/>
@@ -2800,12 +2800,12 @@
         </p:nvSpPr>
         <p:spPr>
           <a:xfrm>
-            <a:off x="10012859" y="2836962"/>
-            <a:ext cx="896441" cy="391120"/>
+            <a:off x="10030213" y="2602371"/>
+            <a:ext cx="882756" cy="391160"/>
           </a:xfrm>
           <a:prstGeom prst="roundRect">
             <a:avLst>
-              <a:gd name="adj" fmla="val 19483"/>
+              <a:gd name="adj" fmla="val 19481"/>
             </a:avLst>
           </a:prstGeom>
           <a:solidFill>
@@ -2822,8 +2822,8 @@
         </p:nvSpPr>
         <p:spPr>
           <a:xfrm>
-            <a:off x="10216059" y="2925862"/>
-            <a:ext cx="540841" cy="238720"/>
+            <a:off x="10233413" y="2691271"/>
+            <a:ext cx="527156" cy="238760"/>
           </a:xfrm>
           <a:prstGeom prst="rect">
             <a:avLst/>
@@ -2866,12 +2866,12 @@
         </p:nvSpPr>
         <p:spPr>
           <a:xfrm>
-            <a:off x="1076325" y="3555107"/>
-            <a:ext cx="3240584" cy="1291431"/>
+            <a:off x="1074491" y="3318721"/>
+            <a:ext cx="3241816" cy="1287921"/>
           </a:xfrm>
           <a:prstGeom prst="roundRect">
             <a:avLst>
-              <a:gd name="adj" fmla="val 7621"/>
+              <a:gd name="adj" fmla="val 7642"/>
             </a:avLst>
           </a:prstGeom>
           <a:solidFill>
@@ -2900,8 +2900,8 @@
         </p:nvSpPr>
         <p:spPr>
           <a:xfrm>
-            <a:off x="1257300" y="3736082"/>
-            <a:ext cx="2964993" cy="223441"/>
+            <a:off x="1253631" y="3497862"/>
+            <a:ext cx="2970041" cy="223520"/>
           </a:xfrm>
           <a:prstGeom prst="rect">
             <a:avLst/>
@@ -2944,8 +2944,8 @@
         </p:nvSpPr>
         <p:spPr>
           <a:xfrm>
-            <a:off x="1257300" y="4035723"/>
-            <a:ext cx="733524" cy="314920"/>
+            <a:off x="1253631" y="3797582"/>
+            <a:ext cx="731802" cy="314960"/>
           </a:xfrm>
           <a:prstGeom prst="roundRect">
             <a:avLst>
@@ -2966,8 +2966,8 @@
         </p:nvSpPr>
         <p:spPr>
           <a:xfrm>
-            <a:off x="1409700" y="4086523"/>
-            <a:ext cx="479524" cy="238720"/>
+            <a:off x="1406031" y="3848382"/>
+            <a:ext cx="477802" cy="238760"/>
           </a:xfrm>
           <a:prstGeom prst="rect">
             <a:avLst/>
@@ -3017,7 +3017,7 @@
         </p:blipFill>
         <p:spPr>
           <a:xfrm>
-            <a:off x="1257300" y="4476353"/>
+            <a:off x="1253631" y="4238273"/>
             <a:ext cx="165100" cy="165100"/>
           </a:xfrm>
           <a:prstGeom prst="rect">
@@ -3033,8 +3033,8 @@
         </p:nvSpPr>
         <p:spPr>
           <a:xfrm>
-            <a:off x="1485900" y="4452243"/>
-            <a:ext cx="1689795" cy="238720"/>
+            <a:off x="1482231" y="4214143"/>
+            <a:ext cx="1676471" cy="238760"/>
           </a:xfrm>
           <a:prstGeom prst="rect">
             <a:avLst/>
@@ -3077,12 +3077,12 @@
         </p:nvSpPr>
         <p:spPr>
           <a:xfrm>
-            <a:off x="4475659" y="3555107"/>
-            <a:ext cx="3240683" cy="1291431"/>
+            <a:off x="4475057" y="3318721"/>
+            <a:ext cx="3241852" cy="1287921"/>
           </a:xfrm>
           <a:prstGeom prst="roundRect">
             <a:avLst>
-              <a:gd name="adj" fmla="val 7621"/>
+              <a:gd name="adj" fmla="val 7642"/>
             </a:avLst>
           </a:prstGeom>
           <a:solidFill>
@@ -3111,8 +3111,8 @@
         </p:nvSpPr>
         <p:spPr>
           <a:xfrm>
-            <a:off x="4656634" y="3736082"/>
-            <a:ext cx="2965095" cy="223441"/>
+            <a:off x="4654197" y="3497862"/>
+            <a:ext cx="2970077" cy="223520"/>
           </a:xfrm>
           <a:prstGeom prst="rect">
             <a:avLst/>
@@ -3155,8 +3155,8 @@
         </p:nvSpPr>
         <p:spPr>
           <a:xfrm>
-            <a:off x="4656634" y="4035723"/>
-            <a:ext cx="593527" cy="314920"/>
+            <a:off x="4654197" y="3797582"/>
+            <a:ext cx="581695" cy="314960"/>
           </a:xfrm>
           <a:prstGeom prst="roundRect">
             <a:avLst>
@@ -3177,8 +3177,8 @@
         </p:nvSpPr>
         <p:spPr>
           <a:xfrm>
-            <a:off x="4809034" y="4086523"/>
-            <a:ext cx="339527" cy="238720"/>
+            <a:off x="4806597" y="3848382"/>
+            <a:ext cx="327695" cy="238760"/>
           </a:xfrm>
           <a:prstGeom prst="rect">
             <a:avLst/>
@@ -3228,7 +3228,7 @@
         </p:blipFill>
         <p:spPr>
           <a:xfrm>
-            <a:off x="4656634" y="4476353"/>
+            <a:off x="4654197" y="4238273"/>
             <a:ext cx="165100" cy="165100"/>
           </a:xfrm>
           <a:prstGeom prst="rect">
@@ -3244,8 +3244,8 @@
         </p:nvSpPr>
         <p:spPr>
           <a:xfrm>
-            <a:off x="4885234" y="4452243"/>
-            <a:ext cx="1557734" cy="238720"/>
+            <a:off x="4882797" y="4214143"/>
+            <a:ext cx="1540369" cy="238760"/>
           </a:xfrm>
           <a:prstGeom prst="rect">
             <a:avLst/>
@@ -3288,12 +3288,12 @@
         </p:nvSpPr>
         <p:spPr>
           <a:xfrm>
-            <a:off x="7875091" y="3555107"/>
-            <a:ext cx="3240584" cy="1291431"/>
+            <a:off x="7875658" y="3318721"/>
+            <a:ext cx="3241852" cy="1287921"/>
           </a:xfrm>
           <a:prstGeom prst="roundRect">
             <a:avLst>
-              <a:gd name="adj" fmla="val 7621"/>
+              <a:gd name="adj" fmla="val 7642"/>
             </a:avLst>
           </a:prstGeom>
           <a:solidFill>
@@ -3322,8 +3322,8 @@
         </p:nvSpPr>
         <p:spPr>
           <a:xfrm>
-            <a:off x="8056066" y="3736082"/>
-            <a:ext cx="2964993" cy="223441"/>
+            <a:off x="8054799" y="3497862"/>
+            <a:ext cx="2970077" cy="223520"/>
           </a:xfrm>
           <a:prstGeom prst="rect">
             <a:avLst/>
@@ -3366,8 +3366,8 @@
         </p:nvSpPr>
         <p:spPr>
           <a:xfrm>
-            <a:off x="8056066" y="4035723"/>
-            <a:ext cx="618827" cy="314920"/>
+            <a:off x="8054799" y="3797582"/>
+            <a:ext cx="608577" cy="314960"/>
           </a:xfrm>
           <a:prstGeom prst="roundRect">
             <a:avLst>
@@ -3388,8 +3388,8 @@
         </p:nvSpPr>
         <p:spPr>
           <a:xfrm>
-            <a:off x="8208466" y="4086523"/>
-            <a:ext cx="364827" cy="238720"/>
+            <a:off x="8207199" y="3848382"/>
+            <a:ext cx="354577" cy="238760"/>
           </a:xfrm>
           <a:prstGeom prst="rect">
             <a:avLst/>
@@ -3439,7 +3439,7 @@
         </p:blipFill>
         <p:spPr>
           <a:xfrm>
-            <a:off x="8056066" y="4476353"/>
+            <a:off x="8054799" y="4238273"/>
             <a:ext cx="165100" cy="165100"/>
           </a:xfrm>
           <a:prstGeom prst="rect">
@@ -3455,8 +3455,8 @@
         </p:nvSpPr>
         <p:spPr>
           <a:xfrm>
-            <a:off x="8284666" y="4452243"/>
-            <a:ext cx="1689795" cy="238720"/>
+            <a:off x="8283399" y="4214143"/>
+            <a:ext cx="1676471" cy="238760"/>
           </a:xfrm>
           <a:prstGeom prst="rect">
             <a:avLst/>
@@ -3499,8 +3499,8 @@
         </p:nvSpPr>
         <p:spPr>
           <a:xfrm>
-            <a:off x="812800" y="5287863"/>
-            <a:ext cx="10883392" cy="238720"/>
+            <a:off x="812800" y="5046134"/>
+            <a:ext cx="10883392" cy="238760"/>
           </a:xfrm>
           <a:prstGeom prst="rect">
             <a:avLst/>
@@ -3543,8 +3543,8 @@
         </p:nvSpPr>
         <p:spPr>
           <a:xfrm>
-            <a:off x="812800" y="6238280"/>
-            <a:ext cx="1684139" cy="238720"/>
+            <a:off x="812800" y="6238241"/>
+            <a:ext cx="1695062" cy="238760"/>
           </a:xfrm>
           <a:prstGeom prst="rect">
             <a:avLst/>
@@ -3587,8 +3587,8 @@
         </p:nvSpPr>
         <p:spPr>
           <a:xfrm>
-            <a:off x="11065966" y="6238280"/>
-            <a:ext cx="364034" cy="238720"/>
+            <a:off x="11069391" y="6238241"/>
+            <a:ext cx="360609" cy="238760"/>
           </a:xfrm>
           <a:prstGeom prst="rect">
             <a:avLst/>
@@ -3664,7 +3664,7 @@
         <p:spPr>
           <a:xfrm>
             <a:off x="812800" y="812800"/>
-            <a:ext cx="10883392" cy="238720"/>
+            <a:ext cx="10883392" cy="238760"/>
           </a:xfrm>
           <a:prstGeom prst="rect">
             <a:avLst/>
@@ -3707,29 +3707,29 @@
         </p:nvSpPr>
         <p:spPr>
           <a:xfrm>
-            <a:off x="812800" y="1203920"/>
-            <a:ext cx="10464800" cy="843161"/>
-          </a:xfrm>
-          <a:prstGeom prst="rect">
-            <a:avLst/>
-          </a:prstGeom>
-          <a:noFill/>
-          <a:ln/>
-        </p:spPr>
-        <p:txBody>
-          <a:bodyPr wrap="square" lIns="0" tIns="0" rIns="0" bIns="0" rtlCol="0" anchor="t">
-            <a:normAutofit/>
-          </a:bodyPr>
-          <a:lstStyle/>
-          <a:p>
-            <a:pPr algn="l" indent="0" marL="0">
-              <a:lnSpc>
-                <a:spcPts val="3220"/>
-              </a:lnSpc>
-              <a:buNone/>
-            </a:pPr>
-            <a:r>
-              <a:rPr lang="en-US" sz="2800" b="1" dirty="0">
+            <a:off x="812800" y="1153161"/>
+            <a:ext cx="10464800" cy="405130"/>
+          </a:xfrm>
+          <a:prstGeom prst="rect">
+            <a:avLst/>
+          </a:prstGeom>
+          <a:noFill/>
+          <a:ln/>
+        </p:spPr>
+        <p:txBody>
+          <a:bodyPr wrap="square" lIns="0" tIns="0" rIns="0" bIns="0" rtlCol="0" anchor="t">
+            <a:normAutofit/>
+          </a:bodyPr>
+          <a:lstStyle/>
+          <a:p>
+            <a:pPr algn="l" indent="0" marL="0">
+              <a:lnSpc>
+                <a:spcPts val="2990"/>
+              </a:lnSpc>
+              <a:buNone/>
+            </a:pPr>
+            <a:r>
+              <a:rPr lang="en-US" sz="2600" b="1" dirty="0">
                 <a:solidFill>
                   <a:srgbClr val="0B1E3D"/>
                 </a:solidFill>
@@ -3739,7 +3739,7 @@
               </a:rPr>
               <a:t>Menos tiempo actualizando tableros, más tiempo interpretando</a:t>
             </a:r>
-            <a:endParaRPr lang="en-US" sz="2800" dirty="0"/>
+            <a:endParaRPr lang="en-US" sz="2600" dirty="0"/>
           </a:p>
         </p:txBody>
       </p:sp>
@@ -3751,29 +3751,29 @@
         </p:nvSpPr>
         <p:spPr>
           <a:xfrm>
-            <a:off x="812800" y="2199481"/>
-            <a:ext cx="10137775" cy="256480"/>
-          </a:xfrm>
-          <a:prstGeom prst="rect">
-            <a:avLst/>
-          </a:prstGeom>
-          <a:noFill/>
-          <a:ln/>
-        </p:spPr>
-        <p:txBody>
-          <a:bodyPr wrap="square" lIns="0" tIns="0" rIns="0" bIns="0" rtlCol="0" anchor="t">
-            <a:normAutofit/>
-          </a:bodyPr>
-          <a:lstStyle/>
-          <a:p>
-            <a:pPr algn="l" indent="0" marL="0">
-              <a:lnSpc>
-                <a:spcPts val="1820"/>
-              </a:lnSpc>
-              <a:buNone/>
-            </a:pPr>
-            <a:r>
-              <a:rPr lang="en-US" sz="1300" dirty="0">
+            <a:off x="812800" y="1659891"/>
+            <a:ext cx="10464800" cy="247650"/>
+          </a:xfrm>
+          <a:prstGeom prst="rect">
+            <a:avLst/>
+          </a:prstGeom>
+          <a:noFill/>
+          <a:ln/>
+        </p:spPr>
+        <p:txBody>
+          <a:bodyPr wrap="square" lIns="0" tIns="0" rIns="0" bIns="0" rtlCol="0" anchor="t">
+            <a:normAutofit/>
+          </a:bodyPr>
+          <a:lstStyle/>
+          <a:p>
+            <a:pPr algn="l" indent="0" marL="0">
+              <a:lnSpc>
+                <a:spcPts val="1750"/>
+              </a:lnSpc>
+              <a:buNone/>
+            </a:pPr>
+            <a:r>
+              <a:rPr lang="en-US" sz="1250" dirty="0">
                 <a:solidFill>
                   <a:srgbClr val="46536B"/>
                 </a:solidFill>
@@ -3781,9 +3781,9 @@
                 <a:ea typeface="IBM Plex Sans" pitchFamily="34" charset="-122"/>
                 <a:cs typeface="IBM Plex Sans" pitchFamily="34" charset="-120"/>
               </a:rPr>
-              <a:t>Agent Mode planifica y ejecuta tareas de varios pasos dentro del libro: refresca tablas y gráficos con el nuevo corte.</a:t>
-            </a:r>
-            <a:endParaRPr lang="en-US" sz="1300" dirty="0"/>
+              <a:t>Así se vería: Agent Mode toma el nuevo corte y refresca las pestañas del tablero — el equipo solo valida.</a:t>
+            </a:r>
+            <a:endParaRPr lang="en-US" sz="1250" dirty="0"/>
           </a:p>
         </p:txBody>
       </p:sp>
@@ -3795,12 +3795,39 @@
         </p:nvSpPr>
         <p:spPr>
           <a:xfrm>
-            <a:off x="815975" y="2611537"/>
-            <a:ext cx="5175250" cy="1895872"/>
+            <a:off x="815975" y="2012316"/>
+            <a:ext cx="10560050" cy="2765213"/>
           </a:xfrm>
           <a:prstGeom prst="roundRect">
             <a:avLst>
-              <a:gd name="adj" fmla="val 6531"/>
+              <a:gd name="adj" fmla="val 5397"/>
+            </a:avLst>
+          </a:prstGeom>
+          <a:solidFill>
+            <a:srgbClr val="F2F4F7"/>
+          </a:solidFill>
+          <a:ln w="6350">
+            <a:solidFill>
+              <a:srgbClr val="E3E6E4"/>
+            </a:solidFill>
+            <a:prstDash val="solid"/>
+          </a:ln>
+        </p:spPr>
+      </p:sp>
+      <p:sp>
+        <p:nvSpPr>
+          <p:cNvPr id="6" name="Shape 4"/>
+          <p:cNvSpPr/>
+          <p:nvPr/>
+        </p:nvSpPr>
+        <p:spPr>
+          <a:xfrm>
+            <a:off x="1023691" y="2220030"/>
+            <a:ext cx="875171" cy="368441"/>
+          </a:xfrm>
+          <a:prstGeom prst="roundRect">
+            <a:avLst>
+              <a:gd name="adj" fmla="val 16373"/>
             </a:avLst>
           </a:prstGeom>
           <a:solidFill>
@@ -3816,29 +3843,357 @@
       </p:sp>
       <p:sp>
         <p:nvSpPr>
-          <p:cNvPr id="6" name="Shape 4"/>
-          <p:cNvSpPr/>
-          <p:nvPr/>
-        </p:nvSpPr>
-        <p:spPr>
-          <a:xfrm>
-            <a:off x="1047750" y="2843312"/>
-            <a:ext cx="355600" cy="355600"/>
+          <p:cNvPr id="7" name="Text 5"/>
+          <p:cNvSpPr/>
+          <p:nvPr/>
+        </p:nvSpPr>
+        <p:spPr>
+          <a:xfrm>
+            <a:off x="1202831" y="2297571"/>
+            <a:ext cx="567690" cy="238760"/>
+          </a:xfrm>
+          <a:prstGeom prst="rect">
+            <a:avLst/>
+          </a:prstGeom>
+          <a:noFill/>
+          <a:ln/>
+        </p:spPr>
+        <p:txBody>
+          <a:bodyPr wrap="square" lIns="0" tIns="0" rIns="0" bIns="0" rtlCol="0" anchor="t">
+            <a:normAutofit/>
+          </a:bodyPr>
+          <a:lstStyle/>
+          <a:p>
+            <a:pPr algn="l" indent="0" marL="0">
+              <a:lnSpc>
+                <a:spcPts val="1680"/>
+              </a:lnSpc>
+              <a:buNone/>
+            </a:pPr>
+            <a:r>
+              <a:rPr lang="en-US" sz="1200" b="1" dirty="0">
+                <a:solidFill>
+                  <a:srgbClr val="6B7A99"/>
+                </a:solidFill>
+                <a:latin typeface="IBM Plex Sans" pitchFamily="34" charset="0"/>
+                <a:ea typeface="IBM Plex Sans" pitchFamily="34" charset="-122"/>
+                <a:cs typeface="IBM Plex Sans" pitchFamily="34" charset="-120"/>
+              </a:rPr>
+              <a:t>Preciso</a:t>
+            </a:r>
+            <a:endParaRPr lang="en-US" sz="1200" dirty="0"/>
+          </a:p>
+        </p:txBody>
+      </p:sp>
+      <p:sp>
+        <p:nvSpPr>
+          <p:cNvPr id="8" name="Shape 6"/>
+          <p:cNvSpPr/>
+          <p:nvPr/>
+        </p:nvSpPr>
+        <p:spPr>
+          <a:xfrm>
+            <a:off x="1981412" y="2220030"/>
+            <a:ext cx="749688" cy="368441"/>
           </a:xfrm>
           <a:prstGeom prst="roundRect">
             <a:avLst>
-              <a:gd name="adj" fmla="val 25000"/>
+              <a:gd name="adj" fmla="val 16373"/>
             </a:avLst>
           </a:prstGeom>
           <a:solidFill>
-            <a:srgbClr val="F2F4F7"/>
+            <a:srgbClr val="FFFFFF"/>
           </a:solidFill>
-          <a:ln/>
-        </p:spPr>
+          <a:ln w="6350">
+            <a:solidFill>
+              <a:srgbClr val="E3E6E4"/>
+            </a:solidFill>
+            <a:prstDash val="solid"/>
+          </a:ln>
+        </p:spPr>
+      </p:sp>
+      <p:sp>
+        <p:nvSpPr>
+          <p:cNvPr id="9" name="Text 7"/>
+          <p:cNvSpPr/>
+          <p:nvPr/>
+        </p:nvSpPr>
+        <p:spPr>
+          <a:xfrm>
+            <a:off x="2160552" y="2297571"/>
+            <a:ext cx="442207" cy="238760"/>
+          </a:xfrm>
+          <a:prstGeom prst="rect">
+            <a:avLst/>
+          </a:prstGeom>
+          <a:noFill/>
+          <a:ln/>
+        </p:spPr>
+        <p:txBody>
+          <a:bodyPr wrap="square" lIns="0" tIns="0" rIns="0" bIns="0" rtlCol="0" anchor="t">
+            <a:normAutofit/>
+          </a:bodyPr>
+          <a:lstStyle/>
+          <a:p>
+            <a:pPr algn="l" indent="0" marL="0">
+              <a:lnSpc>
+                <a:spcPts val="1680"/>
+              </a:lnSpc>
+              <a:buNone/>
+            </a:pPr>
+            <a:r>
+              <a:rPr lang="en-US" sz="1200" b="1" dirty="0">
+                <a:solidFill>
+                  <a:srgbClr val="6B7A99"/>
+                </a:solidFill>
+                <a:latin typeface="IBM Plex Sans" pitchFamily="34" charset="0"/>
+                <a:ea typeface="IBM Plex Sans" pitchFamily="34" charset="-122"/>
+                <a:cs typeface="IBM Plex Sans" pitchFamily="34" charset="-120"/>
+              </a:rPr>
+              <a:t>Micro</a:t>
+            </a:r>
+            <a:endParaRPr lang="en-US" sz="1200" dirty="0"/>
+          </a:p>
+        </p:txBody>
+      </p:sp>
+      <p:sp>
+        <p:nvSpPr>
+          <p:cNvPr id="10" name="Shape 8"/>
+          <p:cNvSpPr/>
+          <p:nvPr/>
+        </p:nvSpPr>
+        <p:spPr>
+          <a:xfrm>
+            <a:off x="2810475" y="2221371"/>
+            <a:ext cx="632354" cy="365760"/>
+          </a:xfrm>
+          <a:prstGeom prst="roundRect">
+            <a:avLst>
+              <a:gd name="adj" fmla="val 17361"/>
+            </a:avLst>
+          </a:prstGeom>
+          <a:solidFill>
+            <a:srgbClr val="0B1E3D"/>
+          </a:solidFill>
+          <a:ln/>
+        </p:spPr>
+      </p:sp>
+      <p:sp>
+        <p:nvSpPr>
+          <p:cNvPr id="11" name="Text 9"/>
+          <p:cNvSpPr/>
+          <p:nvPr/>
+        </p:nvSpPr>
+        <p:spPr>
+          <a:xfrm>
+            <a:off x="2988275" y="2297571"/>
+            <a:ext cx="327554" cy="238760"/>
+          </a:xfrm>
+          <a:prstGeom prst="rect">
+            <a:avLst/>
+          </a:prstGeom>
+          <a:noFill/>
+          <a:ln/>
+        </p:spPr>
+        <p:txBody>
+          <a:bodyPr wrap="square" lIns="0" tIns="0" rIns="0" bIns="0" rtlCol="0" anchor="t">
+            <a:normAutofit/>
+          </a:bodyPr>
+          <a:lstStyle/>
+          <a:p>
+            <a:pPr algn="l" indent="0" marL="0">
+              <a:lnSpc>
+                <a:spcPts val="1680"/>
+              </a:lnSpc>
+              <a:buNone/>
+            </a:pPr>
+            <a:r>
+              <a:rPr lang="en-US" sz="1200" b="1" dirty="0">
+                <a:solidFill>
+                  <a:srgbClr val="FBFBF8"/>
+                </a:solidFill>
+                <a:latin typeface="IBM Plex Sans" pitchFamily="34" charset="0"/>
+                <a:ea typeface="IBM Plex Sans" pitchFamily="34" charset="-122"/>
+                <a:cs typeface="IBM Plex Sans" pitchFamily="34" charset="-120"/>
+              </a:rPr>
+              <a:t>PES</a:t>
+            </a:r>
+            <a:endParaRPr lang="en-US" sz="1200" dirty="0"/>
+          </a:p>
+        </p:txBody>
+      </p:sp>
+      <p:sp>
+        <p:nvSpPr>
+          <p:cNvPr id="12" name="Shape 10"/>
+          <p:cNvSpPr/>
+          <p:nvPr/>
+        </p:nvSpPr>
+        <p:spPr>
+          <a:xfrm>
+            <a:off x="1023691" y="2911052"/>
+            <a:ext cx="4440484" cy="1469531"/>
+          </a:xfrm>
+          <a:prstGeom prst="roundRect">
+            <a:avLst>
+              <a:gd name="adj" fmla="val 6698"/>
+            </a:avLst>
+          </a:prstGeom>
+          <a:solidFill>
+            <a:srgbClr val="FFFFFF">
+              <a:alpha val="60000"/>
+            </a:srgbClr>
+          </a:solidFill>
+          <a:ln w="6350">
+            <a:solidFill>
+              <a:srgbClr val="E3E6E4">
+                <a:alpha val="60000"/>
+              </a:srgbClr>
+            </a:solidFill>
+            <a:prstDash val="solid"/>
+          </a:ln>
+        </p:spPr>
+      </p:sp>
+      <p:sp>
+        <p:nvSpPr>
+          <p:cNvPr id="13" name="Text 11"/>
+          <p:cNvSpPr/>
+          <p:nvPr/>
+        </p:nvSpPr>
+        <p:spPr>
+          <a:xfrm>
+            <a:off x="1228231" y="3115593"/>
+            <a:ext cx="4152346" cy="238760"/>
+          </a:xfrm>
+          <a:prstGeom prst="rect">
+            <a:avLst/>
+          </a:prstGeom>
+          <a:noFill/>
+          <a:ln/>
+        </p:spPr>
+        <p:txBody>
+          <a:bodyPr wrap="square" lIns="0" tIns="0" rIns="0" bIns="0" rtlCol="0" anchor="t">
+            <a:normAutofit/>
+          </a:bodyPr>
+          <a:lstStyle/>
+          <a:p>
+            <a:pPr algn="l" indent="0" marL="0">
+              <a:lnSpc>
+                <a:spcPts val="1680"/>
+              </a:lnSpc>
+              <a:buNone/>
+            </a:pPr>
+            <a:r>
+              <a:rPr lang="en-US" sz="1200" b="1" spc="50" kern="0" dirty="0">
+                <a:solidFill>
+                  <a:srgbClr val="8B98AC">
+                    <a:alpha val="60000"/>
+                  </a:srgbClr>
+                </a:solidFill>
+                <a:latin typeface="IBM Plex Sans" pitchFamily="34" charset="0"/>
+                <a:ea typeface="IBM Plex Sans" pitchFamily="34" charset="-122"/>
+                <a:cs typeface="IBM Plex Sans" pitchFamily="34" charset="-120"/>
+              </a:rPr>
+              <a:t>ANTES · CORTE JUL-2026</a:t>
+            </a:r>
+            <a:endParaRPr lang="en-US" sz="1200" dirty="0"/>
+          </a:p>
+        </p:txBody>
+      </p:sp>
+      <p:sp>
+        <p:nvSpPr>
+          <p:cNvPr id="14" name="Text 12"/>
+          <p:cNvSpPr/>
+          <p:nvPr/>
+        </p:nvSpPr>
+        <p:spPr>
+          <a:xfrm>
+            <a:off x="1228231" y="3392453"/>
+            <a:ext cx="4152346" cy="238760"/>
+          </a:xfrm>
+          <a:prstGeom prst="rect">
+            <a:avLst/>
+          </a:prstGeom>
+          <a:noFill/>
+          <a:ln/>
+        </p:spPr>
+        <p:txBody>
+          <a:bodyPr wrap="square" lIns="0" tIns="0" rIns="0" bIns="0" rtlCol="0" anchor="t">
+            <a:normAutofit/>
+          </a:bodyPr>
+          <a:lstStyle/>
+          <a:p>
+            <a:pPr algn="l" indent="0" marL="0">
+              <a:lnSpc>
+                <a:spcPts val="1680"/>
+              </a:lnSpc>
+              <a:buNone/>
+            </a:pPr>
+            <a:r>
+              <a:rPr lang="en-US" sz="1200" dirty="0">
+                <a:solidFill>
+                  <a:srgbClr val="6B7A99">
+                    <a:alpha val="60000"/>
+                  </a:srgbClr>
+                </a:solidFill>
+                <a:latin typeface="IBM Plex Sans" pitchFamily="34" charset="0"/>
+                <a:ea typeface="IBM Plex Sans" pitchFamily="34" charset="-122"/>
+                <a:cs typeface="IBM Plex Sans" pitchFamily="34" charset="-120"/>
+              </a:rPr>
+              <a:t>Ratio 30 · perfil Rechazado</a:t>
+            </a:r>
+            <a:endParaRPr lang="en-US" sz="1200" dirty="0"/>
+          </a:p>
+        </p:txBody>
+      </p:sp>
+      <p:sp>
+        <p:nvSpPr>
+          <p:cNvPr id="15" name="Text 13"/>
+          <p:cNvSpPr/>
+          <p:nvPr/>
+        </p:nvSpPr>
+        <p:spPr>
+          <a:xfrm>
+            <a:off x="1228231" y="3669312"/>
+            <a:ext cx="4152346" cy="532130"/>
+          </a:xfrm>
+          <a:prstGeom prst="rect">
+            <a:avLst/>
+          </a:prstGeom>
+          <a:noFill/>
+          <a:ln/>
+        </p:spPr>
+        <p:txBody>
+          <a:bodyPr wrap="square" lIns="0" tIns="0" rIns="0" bIns="0" rtlCol="0" anchor="t">
+            <a:normAutofit/>
+          </a:bodyPr>
+          <a:lstStyle/>
+          <a:p>
+            <a:pPr algn="l" indent="0" marL="0">
+              <a:lnSpc>
+                <a:spcPts val="3990"/>
+              </a:lnSpc>
+              <a:buNone/>
+            </a:pPr>
+            <a:r>
+              <a:rPr lang="en-US" sz="3800" b="1" dirty="0">
+                <a:solidFill>
+                  <a:srgbClr val="8B98AC">
+                    <a:alpha val="60000"/>
+                  </a:srgbClr>
+                </a:solidFill>
+                <a:latin typeface="IBM Plex Sans" pitchFamily="34" charset="0"/>
+                <a:ea typeface="IBM Plex Sans" pitchFamily="34" charset="-122"/>
+                <a:cs typeface="IBM Plex Sans" pitchFamily="34" charset="-120"/>
+              </a:rPr>
+              <a:t>26,3%</a:t>
+            </a:r>
+            <a:endParaRPr lang="en-US" sz="3800" dirty="0"/>
+          </a:p>
+        </p:txBody>
       </p:sp>
       <p:pic>
         <p:nvPicPr>
-          <p:cNvPr id="7" name="Image 0" descr="Clock">    </p:cNvPr>
+          <p:cNvPr id="16" name="Image 0" descr="arrow-right">    </p:cNvPr>
           <p:cNvPicPr>
             <a:picLocks noChangeAspect="1"/>
           </p:cNvPicPr>
@@ -3851,8 +4206,8 @@
         </p:blipFill>
         <p:spPr>
           <a:xfrm>
-            <a:off x="1136650" y="2932212"/>
-            <a:ext cx="177800" cy="177800"/>
+            <a:off x="5918200" y="3202587"/>
+            <a:ext cx="355600" cy="139700"/>
           </a:xfrm>
           <a:prstGeom prst="rect">
             <a:avLst/>
@@ -3861,174 +4216,111 @@
       </p:pic>
       <p:sp>
         <p:nvSpPr>
-          <p:cNvPr id="8" name="Text 5"/>
-          <p:cNvSpPr/>
-          <p:nvPr/>
-        </p:nvSpPr>
-        <p:spPr>
-          <a:xfrm>
-            <a:off x="1504950" y="2914452"/>
-            <a:ext cx="1784330" cy="238720"/>
-          </a:xfrm>
-          <a:prstGeom prst="rect">
-            <a:avLst/>
-          </a:prstGeom>
-          <a:noFill/>
-          <a:ln/>
-        </p:spPr>
-        <p:txBody>
-          <a:bodyPr wrap="square" lIns="0" tIns="0" rIns="0" bIns="0" rtlCol="0" anchor="t">
-            <a:normAutofit/>
-          </a:bodyPr>
-          <a:lstStyle/>
-          <a:p>
-            <a:pPr algn="l" indent="0" marL="0">
-              <a:lnSpc>
-                <a:spcPts val="1680"/>
-              </a:lnSpc>
-              <a:buNone/>
-            </a:pPr>
-            <a:r>
-              <a:rPr lang="en-US" sz="1400" b="1" dirty="0">
-                <a:solidFill>
-                  <a:srgbClr val="0B1E3D"/>
-                </a:solidFill>
-                <a:latin typeface="IBM Plex Sans" pitchFamily="34" charset="0"/>
-                <a:ea typeface="IBM Plex Sans" pitchFamily="34" charset="-122"/>
-                <a:cs typeface="IBM Plex Sans" pitchFamily="34" charset="-120"/>
-              </a:rPr>
-              <a:t>Hoy: proceso manual</a:t>
-            </a:r>
-            <a:endParaRPr lang="en-US" sz="1400" dirty="0"/>
-          </a:p>
-        </p:txBody>
-      </p:sp>
-      <p:sp>
-        <p:nvSpPr>
-          <p:cNvPr id="9" name="Text 6"/>
-          <p:cNvSpPr/>
-          <p:nvPr/>
-        </p:nvSpPr>
-        <p:spPr>
-          <a:xfrm>
-            <a:off x="1047750" y="3300512"/>
-            <a:ext cx="4853051" cy="1000522"/>
-          </a:xfrm>
-          <a:prstGeom prst="rect">
-            <a:avLst/>
-          </a:prstGeom>
-          <a:noFill/>
-          <a:ln/>
-        </p:spPr>
-        <p:txBody>
-          <a:bodyPr wrap="square" lIns="0" tIns="0" rIns="0" bIns="0" rtlCol="0" anchor="t">
-            <a:normAutofit/>
-          </a:bodyPr>
-          <a:lstStyle/>
-          <a:p>
-            <a:pPr algn="l" marL="342900" indent="-342900">
-              <a:lnSpc>
-                <a:spcPts val="1920"/>
-              </a:lnSpc>
-              <a:buSzPct val="100000"/>
-              <a:buChar char="•"/>
-            </a:pPr>
-            <a:r>
-              <a:rPr lang="en-US" sz="1200" dirty="0">
-                <a:solidFill>
-                  <a:srgbClr val="46536B"/>
-                </a:solidFill>
-                <a:latin typeface="IBM Plex Sans" pitchFamily="34" charset="0"/>
-                <a:ea typeface="IBM Plex Sans" pitchFamily="34" charset="-122"/>
-                <a:cs typeface="IBM Plex Sans" pitchFamily="34" charset="-120"/>
-              </a:rPr>
-              <a:t>Copiar el nuevo corte a cada tabla</a:t>
-            </a:r>
-            <a:endParaRPr lang="en-US" sz="1200" dirty="0"/>
-          </a:p>
-          <a:p>
-            <a:pPr algn="l" marL="342900" indent="-342900">
-              <a:lnSpc>
-                <a:spcPts val="1920"/>
-              </a:lnSpc>
-              <a:buSzPct val="100000"/>
-              <a:buChar char="•"/>
-            </a:pPr>
-            <a:r>
-              <a:rPr lang="en-US" sz="1200" dirty="0">
-                <a:solidFill>
-                  <a:srgbClr val="46536B"/>
-                </a:solidFill>
-                <a:latin typeface="IBM Plex Sans" pitchFamily="34" charset="0"/>
-                <a:ea typeface="IBM Plex Sans" pitchFamily="34" charset="-122"/>
-                <a:cs typeface="IBM Plex Sans" pitchFamily="34" charset="-120"/>
-              </a:rPr>
-              <a:t>Rehacer los gráficos uno por uno</a:t>
-            </a:r>
-            <a:endParaRPr lang="en-US" sz="1200" dirty="0"/>
-          </a:p>
-          <a:p>
-            <a:pPr algn="l" marL="342900" indent="-342900">
-              <a:lnSpc>
-                <a:spcPts val="1920"/>
-              </a:lnSpc>
-              <a:buSzPct val="100000"/>
-              <a:buChar char="•"/>
-            </a:pPr>
-            <a:r>
-              <a:rPr lang="en-US" sz="1200" dirty="0">
-                <a:solidFill>
-                  <a:srgbClr val="46536B"/>
-                </a:solidFill>
-                <a:latin typeface="IBM Plex Sans" pitchFamily="34" charset="0"/>
-                <a:ea typeface="IBM Plex Sans" pitchFamily="34" charset="-122"/>
-                <a:cs typeface="IBM Plex Sans" pitchFamily="34" charset="-120"/>
-              </a:rPr>
-              <a:t>Revisar que cuadren los porcentajes</a:t>
-            </a:r>
-            <a:endParaRPr lang="en-US" sz="1200" dirty="0"/>
-          </a:p>
-          <a:p>
-            <a:pPr algn="l" marL="342900" indent="-342900">
-              <a:lnSpc>
-                <a:spcPts val="1920"/>
-              </a:lnSpc>
-              <a:buSzPct val="100000"/>
-              <a:buChar char="•"/>
-            </a:pPr>
-            <a:r>
-              <a:rPr lang="en-US" sz="1200" dirty="0">
-                <a:solidFill>
-                  <a:srgbClr val="46536B"/>
-                </a:solidFill>
-                <a:latin typeface="IBM Plex Sans" pitchFamily="34" charset="0"/>
-                <a:ea typeface="IBM Plex Sans" pitchFamily="34" charset="-122"/>
-                <a:cs typeface="IBM Plex Sans" pitchFamily="34" charset="-120"/>
-              </a:rPr>
-              <a:t>Repetir por cada tablero: Preciso, Micro, PES...</a:t>
-            </a:r>
-            <a:endParaRPr lang="en-US" sz="1200" dirty="0"/>
-          </a:p>
-        </p:txBody>
-      </p:sp>
-      <p:sp>
-        <p:nvSpPr>
-          <p:cNvPr id="10" name="Shape 7"/>
-          <p:cNvSpPr/>
-          <p:nvPr/>
-        </p:nvSpPr>
-        <p:spPr>
-          <a:xfrm>
-            <a:off x="6200775" y="2611537"/>
-            <a:ext cx="5175250" cy="1895872"/>
+          <p:cNvPr id="17" name="Shape 14"/>
+          <p:cNvSpPr/>
+          <p:nvPr/>
+        </p:nvSpPr>
+        <p:spPr>
+          <a:xfrm>
+            <a:off x="5892800" y="3405787"/>
+            <a:ext cx="406400" cy="406400"/>
           </a:xfrm>
           <a:prstGeom prst="roundRect">
             <a:avLst>
-              <a:gd name="adj" fmla="val 6531"/>
+              <a:gd name="adj" fmla="val 50000"/>
             </a:avLst>
           </a:prstGeom>
           <a:solidFill>
-            <a:srgbClr val="FEF8E7"/>
+            <a:srgbClr val="0B1E3D"/>
+          </a:solidFill>
+          <a:ln/>
+        </p:spPr>
+      </p:sp>
+      <p:pic>
+        <p:nvPicPr>
+          <p:cNvPr id="18" name="Image 1" descr="Lightning">    </p:cNvPr>
+          <p:cNvPicPr>
+            <a:picLocks noChangeAspect="1"/>
+          </p:cNvPicPr>
+          <p:nvPr/>
+        </p:nvPicPr>
+        <p:blipFill>
+          <a:blip r:embed="rId2"/>
+          <a:srcRect l="0" r="0" t="0" b="0"/>
+          <a:stretch/>
+        </p:blipFill>
+        <p:spPr>
+          <a:xfrm>
+            <a:off x="6000750" y="3513737"/>
+            <a:ext cx="190500" cy="190500"/>
+          </a:xfrm>
+          <a:prstGeom prst="rect">
+            <a:avLst/>
+          </a:prstGeom>
+        </p:spPr>
+      </p:pic>
+      <p:sp>
+        <p:nvSpPr>
+          <p:cNvPr id="19" name="Text 15"/>
+          <p:cNvSpPr/>
+          <p:nvPr/>
+        </p:nvSpPr>
+        <p:spPr>
+          <a:xfrm>
+            <a:off x="5654569" y="3875687"/>
+            <a:ext cx="882826" cy="238760"/>
+          </a:xfrm>
+          <a:prstGeom prst="rect">
+            <a:avLst/>
+          </a:prstGeom>
+          <a:noFill/>
+          <a:ln/>
+        </p:spPr>
+        <p:txBody>
+          <a:bodyPr wrap="square" lIns="0" tIns="0" rIns="0" bIns="0" rtlCol="0" anchor="t">
+            <a:normAutofit/>
+          </a:bodyPr>
+          <a:lstStyle/>
+          <a:p>
+            <a:pPr algn="ctr" indent="0" marL="0">
+              <a:lnSpc>
+                <a:spcPts val="1680"/>
+              </a:lnSpc>
+              <a:buNone/>
+            </a:pPr>
+            <a:r>
+              <a:rPr lang="en-US" sz="1200" b="1" dirty="0">
+                <a:solidFill>
+                  <a:srgbClr val="0B1E3D"/>
+                </a:solidFill>
+                <a:latin typeface="IBM Plex Sans" pitchFamily="34" charset="0"/>
+                <a:ea typeface="IBM Plex Sans" pitchFamily="34" charset="-122"/>
+                <a:cs typeface="IBM Plex Sans" pitchFamily="34" charset="-120"/>
+              </a:rPr>
+              <a:t>Agent Mode</a:t>
+            </a:r>
+            <a:endParaRPr lang="en-US" sz="1200" dirty="0"/>
+          </a:p>
+        </p:txBody>
+      </p:sp>
+      <p:sp>
+        <p:nvSpPr>
+          <p:cNvPr id="20" name="Shape 16"/>
+          <p:cNvSpPr/>
+          <p:nvPr/>
+        </p:nvSpPr>
+        <p:spPr>
+          <a:xfrm>
+            <a:off x="6727825" y="2721821"/>
+            <a:ext cx="4440484" cy="1847991"/>
+          </a:xfrm>
+          <a:prstGeom prst="roundRect">
+            <a:avLst>
+              <a:gd name="adj" fmla="val 5326"/>
+            </a:avLst>
+          </a:prstGeom>
+          <a:solidFill>
+            <a:srgbClr val="FFFFFF"/>
           </a:solidFill>
           <a:ln w="6350">
             <a:solidFill>
@@ -4036,63 +4328,179 @@
             </a:solidFill>
             <a:prstDash val="solid"/>
           </a:ln>
-        </p:spPr>
-      </p:sp>
-      <p:sp>
-        <p:nvSpPr>
-          <p:cNvPr id="11" name="Shape 8"/>
-          <p:cNvSpPr/>
-          <p:nvPr/>
-        </p:nvSpPr>
-        <p:spPr>
-          <a:xfrm>
-            <a:off x="6432550" y="2843312"/>
-            <a:ext cx="355600" cy="355600"/>
+          <a:effectLst>
+            <a:outerShdw sx="100000" sy="100000" kx="0" ky="0" algn="bl" rotWithShape="0" blurRad="152400" dist="25400" dir="5400000">
+              <a:srgbClr val="000000">
+                <a:alpha val="6000"/>
+              </a:srgbClr>
+            </a:outerShdw>
+          </a:effectLst>
+        </p:spPr>
+      </p:sp>
+      <p:sp>
+        <p:nvSpPr>
+          <p:cNvPr id="21" name="Text 17"/>
+          <p:cNvSpPr/>
+          <p:nvPr/>
+        </p:nvSpPr>
+        <p:spPr>
+          <a:xfrm>
+            <a:off x="6932366" y="2926362"/>
+            <a:ext cx="4152346" cy="238760"/>
+          </a:xfrm>
+          <a:prstGeom prst="rect">
+            <a:avLst/>
+          </a:prstGeom>
+          <a:noFill/>
+          <a:ln/>
+        </p:spPr>
+        <p:txBody>
+          <a:bodyPr wrap="square" lIns="0" tIns="0" rIns="0" bIns="0" rtlCol="0" anchor="t">
+            <a:normAutofit/>
+          </a:bodyPr>
+          <a:lstStyle/>
+          <a:p>
+            <a:pPr algn="l" indent="0" marL="0">
+              <a:lnSpc>
+                <a:spcPts val="1680"/>
+              </a:lnSpc>
+              <a:buNone/>
+            </a:pPr>
+            <a:r>
+              <a:rPr lang="en-US" sz="1200" b="1" spc="50" kern="0" dirty="0">
+                <a:solidFill>
+                  <a:srgbClr val="8A6100"/>
+                </a:solidFill>
+                <a:latin typeface="IBM Plex Sans" pitchFamily="34" charset="0"/>
+                <a:ea typeface="IBM Plex Sans" pitchFamily="34" charset="-122"/>
+                <a:cs typeface="IBM Plex Sans" pitchFamily="34" charset="-120"/>
+              </a:rPr>
+              <a:t>DESPUÉS · CORTE AGO-2026</a:t>
+            </a:r>
+            <a:endParaRPr lang="en-US" sz="1200" dirty="0"/>
+          </a:p>
+        </p:txBody>
+      </p:sp>
+      <p:sp>
+        <p:nvSpPr>
+          <p:cNvPr id="22" name="Text 18"/>
+          <p:cNvSpPr/>
+          <p:nvPr/>
+        </p:nvSpPr>
+        <p:spPr>
+          <a:xfrm>
+            <a:off x="6932366" y="3203223"/>
+            <a:ext cx="4152346" cy="238760"/>
+          </a:xfrm>
+          <a:prstGeom prst="rect">
+            <a:avLst/>
+          </a:prstGeom>
+          <a:noFill/>
+          <a:ln/>
+        </p:spPr>
+        <p:txBody>
+          <a:bodyPr wrap="square" lIns="0" tIns="0" rIns="0" bIns="0" rtlCol="0" anchor="t">
+            <a:normAutofit/>
+          </a:bodyPr>
+          <a:lstStyle/>
+          <a:p>
+            <a:pPr algn="l" indent="0" marL="0">
+              <a:lnSpc>
+                <a:spcPts val="1680"/>
+              </a:lnSpc>
+              <a:buNone/>
+            </a:pPr>
+            <a:r>
+              <a:rPr lang="en-US" sz="1200" dirty="0">
+                <a:solidFill>
+                  <a:srgbClr val="46536B"/>
+                </a:solidFill>
+                <a:latin typeface="IBM Plex Sans" pitchFamily="34" charset="0"/>
+                <a:ea typeface="IBM Plex Sans" pitchFamily="34" charset="-122"/>
+                <a:cs typeface="IBM Plex Sans" pitchFamily="34" charset="-120"/>
+              </a:rPr>
+              <a:t>Ratio 30 · perfil Rechazado</a:t>
+            </a:r>
+            <a:endParaRPr lang="en-US" sz="1200" dirty="0"/>
+          </a:p>
+        </p:txBody>
+      </p:sp>
+      <p:sp>
+        <p:nvSpPr>
+          <p:cNvPr id="23" name="Text 19"/>
+          <p:cNvSpPr/>
+          <p:nvPr/>
+        </p:nvSpPr>
+        <p:spPr>
+          <a:xfrm>
+            <a:off x="6932366" y="3480082"/>
+            <a:ext cx="4152346" cy="532130"/>
+          </a:xfrm>
+          <a:prstGeom prst="rect">
+            <a:avLst/>
+          </a:prstGeom>
+          <a:noFill/>
+          <a:ln/>
+        </p:spPr>
+        <p:txBody>
+          <a:bodyPr wrap="square" lIns="0" tIns="0" rIns="0" bIns="0" rtlCol="0" anchor="t">
+            <a:normAutofit/>
+          </a:bodyPr>
+          <a:lstStyle/>
+          <a:p>
+            <a:pPr algn="l" indent="0" marL="0">
+              <a:lnSpc>
+                <a:spcPts val="3990"/>
+              </a:lnSpc>
+              <a:buNone/>
+            </a:pPr>
+            <a:r>
+              <a:rPr lang="en-US" sz="3800" b="1" dirty="0">
+                <a:solidFill>
+                  <a:srgbClr val="0B1E3D"/>
+                </a:solidFill>
+                <a:latin typeface="IBM Plex Sans" pitchFamily="34" charset="0"/>
+                <a:ea typeface="IBM Plex Sans" pitchFamily="34" charset="-122"/>
+                <a:cs typeface="IBM Plex Sans" pitchFamily="34" charset="-120"/>
+              </a:rPr>
+              <a:t>27,3%</a:t>
+            </a:r>
+            <a:endParaRPr lang="en-US" sz="3800" dirty="0"/>
+          </a:p>
+        </p:txBody>
+      </p:sp>
+      <p:sp>
+        <p:nvSpPr>
+          <p:cNvPr id="24" name="Shape 20"/>
+          <p:cNvSpPr/>
+          <p:nvPr/>
+        </p:nvSpPr>
+        <p:spPr>
+          <a:xfrm>
+            <a:off x="6932366" y="4050312"/>
+            <a:ext cx="2073169" cy="314960"/>
           </a:xfrm>
           <a:prstGeom prst="roundRect">
             <a:avLst>
-              <a:gd name="adj" fmla="val 25000"/>
+              <a:gd name="adj" fmla="val 50000"/>
             </a:avLst>
           </a:prstGeom>
           <a:solidFill>
-            <a:srgbClr val="0B1E3D"/>
+            <a:srgbClr val="DCF5E3"/>
           </a:solidFill>
           <a:ln/>
         </p:spPr>
       </p:sp>
-      <p:pic>
-        <p:nvPicPr>
-          <p:cNvPr id="12" name="Image 1" descr="Lightning">    </p:cNvPr>
-          <p:cNvPicPr>
-            <a:picLocks noChangeAspect="1"/>
-          </p:cNvPicPr>
-          <p:nvPr/>
-        </p:nvPicPr>
-        <p:blipFill>
-          <a:blip r:embed="rId2"/>
-          <a:srcRect l="0" r="0" t="0" b="0"/>
-          <a:stretch/>
-        </p:blipFill>
-        <p:spPr>
-          <a:xfrm>
-            <a:off x="6521450" y="2932212"/>
-            <a:ext cx="177800" cy="177800"/>
-          </a:xfrm>
-          <a:prstGeom prst="rect">
-            <a:avLst/>
-          </a:prstGeom>
-        </p:spPr>
-      </p:pic>
-      <p:sp>
-        <p:nvSpPr>
-          <p:cNvPr id="13" name="Text 9"/>
-          <p:cNvSpPr/>
-          <p:nvPr/>
-        </p:nvSpPr>
-        <p:spPr>
-          <a:xfrm>
-            <a:off x="6889750" y="2914452"/>
-            <a:ext cx="1390352" cy="238720"/>
+      <p:sp>
+        <p:nvSpPr>
+          <p:cNvPr id="25" name="Text 21"/>
+          <p:cNvSpPr/>
+          <p:nvPr/>
+        </p:nvSpPr>
+        <p:spPr>
+          <a:xfrm>
+            <a:off x="7072066" y="4101112"/>
+            <a:ext cx="1847582" cy="238760"/>
           </a:xfrm>
           <a:prstGeom prst="rect">
             <a:avLst/>
@@ -4113,7 +4521,51 @@
               <a:buNone/>
             </a:pPr>
             <a:r>
-              <a:rPr lang="en-US" sz="1400" b="1" dirty="0">
+              <a:rPr lang="en-US" sz="1200" b="1" dirty="0">
+                <a:solidFill>
+                  <a:srgbClr val="1F7A43"/>
+                </a:solidFill>
+                <a:latin typeface="IBM Plex Sans" pitchFamily="34" charset="0"/>
+                <a:ea typeface="IBM Plex Sans" pitchFamily="34" charset="-122"/>
+                <a:cs typeface="IBM Plex Sans" pitchFamily="34" charset="-120"/>
+              </a:rPr>
+              <a:t>Generado por Agent Mode</a:t>
+            </a:r>
+            <a:endParaRPr lang="en-US" sz="1200" dirty="0"/>
+          </a:p>
+        </p:txBody>
+      </p:sp>
+      <p:sp>
+        <p:nvSpPr>
+          <p:cNvPr id="26" name="Text 22"/>
+          <p:cNvSpPr/>
+          <p:nvPr/>
+        </p:nvSpPr>
+        <p:spPr>
+          <a:xfrm>
+            <a:off x="812800" y="4907704"/>
+            <a:ext cx="10883392" cy="238760"/>
+          </a:xfrm>
+          <a:prstGeom prst="rect">
+            <a:avLst/>
+          </a:prstGeom>
+          <a:noFill/>
+          <a:ln/>
+        </p:spPr>
+        <p:txBody>
+          <a:bodyPr wrap="square" lIns="0" tIns="0" rIns="0" bIns="0" rtlCol="0" anchor="t">
+            <a:normAutofit/>
+          </a:bodyPr>
+          <a:lstStyle/>
+          <a:p>
+            <a:pPr algn="l" indent="0" marL="0">
+              <a:lnSpc>
+                <a:spcPts val="1680"/>
+              </a:lnSpc>
+              <a:buNone/>
+            </a:pPr>
+            <a:r>
+              <a:rPr lang="en-US" sz="1200" b="1" dirty="0">
                 <a:solidFill>
                   <a:srgbClr val="0B1E3D"/>
                 </a:solidFill>
@@ -4121,178 +4573,26 @@
                 <a:ea typeface="IBM Plex Sans" pitchFamily="34" charset="-122"/>
                 <a:cs typeface="IBM Plex Sans" pitchFamily="34" charset="-120"/>
               </a:rPr>
-              <a:t>Con Agent Mode</a:t>
-            </a:r>
-            <a:endParaRPr lang="en-US" sz="1400" dirty="0"/>
-          </a:p>
-        </p:txBody>
-      </p:sp>
-      <p:sp>
-        <p:nvSpPr>
-          <p:cNvPr id="14" name="Text 10"/>
-          <p:cNvSpPr/>
-          <p:nvPr/>
-        </p:nvSpPr>
-        <p:spPr>
-          <a:xfrm>
-            <a:off x="6432550" y="3300512"/>
-            <a:ext cx="4853051" cy="1000522"/>
-          </a:xfrm>
-          <a:prstGeom prst="rect">
-            <a:avLst/>
-          </a:prstGeom>
-          <a:noFill/>
-          <a:ln/>
-        </p:spPr>
-        <p:txBody>
-          <a:bodyPr wrap="square" lIns="0" tIns="0" rIns="0" bIns="0" rtlCol="0" anchor="t">
-            <a:normAutofit/>
-          </a:bodyPr>
-          <a:lstStyle/>
-          <a:p>
-            <a:pPr algn="l" marL="342900" indent="-342900">
-              <a:lnSpc>
-                <a:spcPts val="1920"/>
-              </a:lnSpc>
-              <a:buSzPct val="100000"/>
-              <a:buChar char="•"/>
-            </a:pPr>
-            <a:r>
-              <a:rPr lang="en-US" sz="1200" dirty="0">
-                <a:solidFill>
-                  <a:srgbClr val="46536B"/>
-                </a:solidFill>
-                <a:latin typeface="IBM Plex Sans" pitchFamily="34" charset="0"/>
-                <a:ea typeface="IBM Plex Sans" pitchFamily="34" charset="-122"/>
-                <a:cs typeface="IBM Plex Sans" pitchFamily="34" charset="-120"/>
-              </a:rPr>
-              <a:t>Cargar la base con el nuevo corte</a:t>
+              <a:t>Aplicable hoy en:</a:t>
             </a:r>
             <a:endParaRPr lang="en-US" sz="1200" dirty="0"/>
           </a:p>
-          <a:p>
-            <a:pPr algn="l" marL="342900" indent="-342900">
-              <a:lnSpc>
-                <a:spcPts val="1920"/>
-              </a:lnSpc>
-              <a:buSzPct val="100000"/>
-              <a:buChar char="•"/>
-            </a:pPr>
-            <a:r>
-              <a:rPr lang="en-US" sz="1200" dirty="0">
-                <a:solidFill>
-                  <a:srgbClr val="46536B"/>
-                </a:solidFill>
-                <a:latin typeface="IBM Plex Sans" pitchFamily="34" charset="0"/>
-                <a:ea typeface="IBM Plex Sans" pitchFamily="34" charset="-122"/>
-                <a:cs typeface="IBM Plex Sans" pitchFamily="34" charset="-120"/>
-              </a:rPr>
-              <a:t>Agent Mode refresca tablas y gráficos</a:t>
-            </a:r>
-            <a:endParaRPr lang="en-US" sz="1200" dirty="0"/>
-          </a:p>
-          <a:p>
-            <a:pPr algn="l" marL="342900" indent="-342900">
-              <a:lnSpc>
-                <a:spcPts val="1920"/>
-              </a:lnSpc>
-              <a:buSzPct val="100000"/>
-              <a:buChar char="•"/>
-            </a:pPr>
-            <a:r>
-              <a:rPr lang="en-US" sz="1200" dirty="0">
-                <a:solidFill>
-                  <a:srgbClr val="46536B"/>
-                </a:solidFill>
-                <a:latin typeface="IBM Plex Sans" pitchFamily="34" charset="0"/>
-                <a:ea typeface="IBM Plex Sans" pitchFamily="34" charset="-122"/>
-                <a:cs typeface="IBM Plex Sans" pitchFamily="34" charset="-120"/>
-              </a:rPr>
-              <a:t>El equipo valida el resultado</a:t>
-            </a:r>
-            <a:endParaRPr lang="en-US" sz="1200" dirty="0"/>
-          </a:p>
-          <a:p>
-            <a:pPr algn="l" marL="342900" indent="-342900">
-              <a:lnSpc>
-                <a:spcPts val="1920"/>
-              </a:lnSpc>
-              <a:buSzPct val="100000"/>
-              <a:buChar char="•"/>
-            </a:pPr>
-            <a:r>
-              <a:rPr lang="en-US" sz="1200" dirty="0">
-                <a:solidFill>
-                  <a:srgbClr val="46536B"/>
-                </a:solidFill>
-                <a:latin typeface="IBM Plex Sans" pitchFamily="34" charset="0"/>
-                <a:ea typeface="IBM Plex Sans" pitchFamily="34" charset="-122"/>
-                <a:cs typeface="IBM Plex Sans" pitchFamily="34" charset="-120"/>
-              </a:rPr>
-              <a:t>Mismo tiempo, más tableros cubiertos</a:t>
-            </a:r>
-            <a:endParaRPr lang="en-US" sz="1200" dirty="0"/>
-          </a:p>
-        </p:txBody>
-      </p:sp>
-      <p:sp>
-        <p:nvSpPr>
-          <p:cNvPr id="15" name="Text 11"/>
-          <p:cNvSpPr/>
-          <p:nvPr/>
-        </p:nvSpPr>
-        <p:spPr>
-          <a:xfrm>
-            <a:off x="812800" y="4688384"/>
-            <a:ext cx="10883392" cy="238720"/>
-          </a:xfrm>
-          <a:prstGeom prst="rect">
-            <a:avLst/>
-          </a:prstGeom>
-          <a:noFill/>
-          <a:ln/>
-        </p:spPr>
-        <p:txBody>
-          <a:bodyPr wrap="square" lIns="0" tIns="0" rIns="0" bIns="0" rtlCol="0" anchor="t">
-            <a:normAutofit/>
-          </a:bodyPr>
-          <a:lstStyle/>
-          <a:p>
-            <a:pPr algn="l" indent="0" marL="0">
-              <a:lnSpc>
-                <a:spcPts val="1680"/>
-              </a:lnSpc>
-              <a:buNone/>
-            </a:pPr>
-            <a:r>
-              <a:rPr lang="en-US" sz="1200" b="1" dirty="0">
-                <a:solidFill>
-                  <a:srgbClr val="0B1E3D"/>
-                </a:solidFill>
-                <a:latin typeface="IBM Plex Sans" pitchFamily="34" charset="0"/>
-                <a:ea typeface="IBM Plex Sans" pitchFamily="34" charset="-122"/>
-                <a:cs typeface="IBM Plex Sans" pitchFamily="34" charset="-120"/>
-              </a:rPr>
-              <a:t>Aplicable hoy en:</a:t>
-            </a:r>
-            <a:endParaRPr lang="en-US" sz="1200" dirty="0"/>
-          </a:p>
-        </p:txBody>
-      </p:sp>
-      <p:sp>
-        <p:nvSpPr>
-          <p:cNvPr id="16" name="Shape 12"/>
-          <p:cNvSpPr/>
-          <p:nvPr/>
-        </p:nvSpPr>
-        <p:spPr>
-          <a:xfrm>
-            <a:off x="812800" y="5003304"/>
-            <a:ext cx="4053086" cy="391120"/>
+        </p:txBody>
+      </p:sp>
+      <p:sp>
+        <p:nvSpPr>
+          <p:cNvPr id="27" name="Shape 23"/>
+          <p:cNvSpPr/>
+          <p:nvPr/>
+        </p:nvSpPr>
+        <p:spPr>
+          <a:xfrm>
+            <a:off x="812800" y="5197264"/>
+            <a:ext cx="4019197" cy="391160"/>
           </a:xfrm>
           <a:prstGeom prst="roundRect">
             <a:avLst>
-              <a:gd name="adj" fmla="val 19483"/>
+              <a:gd name="adj" fmla="val 19481"/>
             </a:avLst>
           </a:prstGeom>
           <a:solidFill>
@@ -4303,14 +4603,14 @@
       </p:sp>
       <p:sp>
         <p:nvSpPr>
-          <p:cNvPr id="17" name="Text 13"/>
-          <p:cNvSpPr/>
-          <p:nvPr/>
-        </p:nvSpPr>
-        <p:spPr>
-          <a:xfrm>
-            <a:off x="990600" y="5092204"/>
-            <a:ext cx="3808411" cy="238720"/>
+          <p:cNvPr id="28" name="Text 24"/>
+          <p:cNvSpPr/>
+          <p:nvPr/>
+        </p:nvSpPr>
+        <p:spPr>
+          <a:xfrm>
+            <a:off x="990600" y="5286164"/>
+            <a:ext cx="3773505" cy="238760"/>
           </a:xfrm>
           <a:prstGeom prst="rect">
             <a:avLst/>
@@ -4347,18 +4647,18 @@
       </p:sp>
       <p:sp>
         <p:nvSpPr>
-          <p:cNvPr id="18" name="Shape 14"/>
-          <p:cNvSpPr/>
-          <p:nvPr/>
-        </p:nvSpPr>
-        <p:spPr>
-          <a:xfrm>
-            <a:off x="4967486" y="5003304"/>
-            <a:ext cx="3578423" cy="391120"/>
+          <p:cNvPr id="29" name="Shape 25"/>
+          <p:cNvSpPr/>
+          <p:nvPr/>
+        </p:nvSpPr>
+        <p:spPr>
+          <a:xfrm>
+            <a:off x="4933597" y="5197264"/>
+            <a:ext cx="3514831" cy="391160"/>
           </a:xfrm>
           <a:prstGeom prst="roundRect">
             <a:avLst>
-              <a:gd name="adj" fmla="val 19483"/>
+              <a:gd name="adj" fmla="val 19481"/>
             </a:avLst>
           </a:prstGeom>
           <a:solidFill>
@@ -4369,14 +4669,14 @@
       </p:sp>
       <p:sp>
         <p:nvSpPr>
-          <p:cNvPr id="19" name="Text 15"/>
-          <p:cNvSpPr/>
-          <p:nvPr/>
-        </p:nvSpPr>
-        <p:spPr>
-          <a:xfrm>
-            <a:off x="5145286" y="5092204"/>
-            <a:ext cx="3319508" cy="238720"/>
+          <p:cNvPr id="30" name="Text 26"/>
+          <p:cNvSpPr/>
+          <p:nvPr/>
+        </p:nvSpPr>
+        <p:spPr>
+          <a:xfrm>
+            <a:off x="5111397" y="5286164"/>
+            <a:ext cx="3254008" cy="238760"/>
           </a:xfrm>
           <a:prstGeom prst="rect">
             <a:avLst/>
@@ -4413,14 +4713,14 @@
       </p:sp>
       <p:sp>
         <p:nvSpPr>
-          <p:cNvPr id="20" name="Text 16"/>
-          <p:cNvSpPr/>
-          <p:nvPr/>
-        </p:nvSpPr>
-        <p:spPr>
-          <a:xfrm>
-            <a:off x="812800" y="6238280"/>
-            <a:ext cx="1684139" cy="238720"/>
+          <p:cNvPr id="31" name="Text 27"/>
+          <p:cNvSpPr/>
+          <p:nvPr/>
+        </p:nvSpPr>
+        <p:spPr>
+          <a:xfrm>
+            <a:off x="812800" y="6238239"/>
+            <a:ext cx="1695062" cy="238760"/>
           </a:xfrm>
           <a:prstGeom prst="rect">
             <a:avLst/>
@@ -4457,14 +4757,14 @@
       </p:sp>
       <p:sp>
         <p:nvSpPr>
-          <p:cNvPr id="21" name="Text 17"/>
-          <p:cNvSpPr/>
-          <p:nvPr/>
-        </p:nvSpPr>
-        <p:spPr>
-          <a:xfrm>
-            <a:off x="11065966" y="6238280"/>
-            <a:ext cx="364034" cy="238720"/>
+          <p:cNvPr id="32" name="Text 28"/>
+          <p:cNvSpPr/>
+          <p:nvPr/>
+        </p:nvSpPr>
+        <p:spPr>
+          <a:xfrm>
+            <a:off x="11069391" y="6238239"/>
+            <a:ext cx="360609" cy="238760"/>
           </a:xfrm>
           <a:prstGeom prst="rect">
             <a:avLst/>
@@ -4540,7 +4840,7 @@
         <p:spPr>
           <a:xfrm>
             <a:off x="812800" y="812800"/>
-            <a:ext cx="10883392" cy="238720"/>
+            <a:ext cx="10883392" cy="238760"/>
           </a:xfrm>
           <a:prstGeom prst="rect">
             <a:avLst/>
@@ -4569,7 +4869,7 @@
                 <a:ea typeface="IBM Plex Sans" pitchFamily="34" charset="-122"/>
                 <a:cs typeface="IBM Plex Sans" pitchFamily="34" charset="-120"/>
               </a:rPr>
-              <a:t>VENTAJA 4 · ANÁLISIS DE DETERIORO</a:t>
+              <a:t>VENTAJA 4 · MONITOREO DE PERFIL INDIVIDUAL</a:t>
             </a:r>
             <a:endParaRPr lang="en-US" sz="1200" dirty="0"/>
           </a:p>
@@ -4583,29 +4883,29 @@
         </p:nvSpPr>
         <p:spPr>
           <a:xfrm>
-            <a:off x="812800" y="1280120"/>
-            <a:ext cx="10464800" cy="434280"/>
-          </a:xfrm>
-          <a:prstGeom prst="rect">
-            <a:avLst/>
-          </a:prstGeom>
-          <a:noFill/>
-          <a:ln/>
-        </p:spPr>
-        <p:txBody>
-          <a:bodyPr wrap="square" lIns="0" tIns="0" rIns="0" bIns="0" rtlCol="0" anchor="t">
-            <a:normAutofit/>
-          </a:bodyPr>
-          <a:lstStyle/>
-          <a:p>
-            <a:pPr algn="l" indent="0" marL="0">
-              <a:lnSpc>
-                <a:spcPts val="3220"/>
-              </a:lnSpc>
-              <a:buNone/>
-            </a:pPr>
-            <a:r>
-              <a:rPr lang="en-US" sz="2800" b="1" dirty="0">
+            <a:off x="812800" y="1153161"/>
+            <a:ext cx="10464800" cy="405130"/>
+          </a:xfrm>
+          <a:prstGeom prst="rect">
+            <a:avLst/>
+          </a:prstGeom>
+          <a:noFill/>
+          <a:ln/>
+        </p:spPr>
+        <p:txBody>
+          <a:bodyPr wrap="square" lIns="0" tIns="0" rIns="0" bIns="0" rtlCol="0" anchor="t">
+            <a:normAutofit/>
+          </a:bodyPr>
+          <a:lstStyle/>
+          <a:p>
+            <a:pPr algn="l" indent="0" marL="0">
+              <a:lnSpc>
+                <a:spcPts val="2990"/>
+              </a:lnSpc>
+              <a:buNone/>
+            </a:pPr>
+            <a:r>
+              <a:rPr lang="en-US" sz="2600" b="1" dirty="0">
                 <a:solidFill>
                   <a:srgbClr val="0B1E3D"/>
                 </a:solidFill>
@@ -4615,7 +4915,7 @@
               </a:rPr>
               <a:t>De justificar caso por caso a entender el patrón agregado</a:t>
             </a:r>
-            <a:endParaRPr lang="en-US" sz="2800" dirty="0"/>
+            <a:endParaRPr lang="en-US" sz="2600" dirty="0"/>
           </a:p>
         </p:txBody>
       </p:sp>
@@ -4627,29 +4927,29 @@
         </p:nvSpPr>
         <p:spPr>
           <a:xfrm>
-            <a:off x="812800" y="1943001"/>
-            <a:ext cx="10137775" cy="256480"/>
-          </a:xfrm>
-          <a:prstGeom prst="rect">
-            <a:avLst/>
-          </a:prstGeom>
-          <a:noFill/>
-          <a:ln/>
-        </p:spPr>
-        <p:txBody>
-          <a:bodyPr wrap="square" lIns="0" tIns="0" rIns="0" bIns="0" rtlCol="0" anchor="t">
-            <a:normAutofit/>
-          </a:bodyPr>
-          <a:lstStyle/>
-          <a:p>
-            <a:pPr algn="l" indent="0" marL="0">
-              <a:lnSpc>
-                <a:spcPts val="1820"/>
-              </a:lnSpc>
-              <a:buNone/>
-            </a:pPr>
-            <a:r>
-              <a:rPr lang="en-US" sz="1300" dirty="0">
+            <a:off x="812800" y="1659889"/>
+            <a:ext cx="10464800" cy="247650"/>
+          </a:xfrm>
+          <a:prstGeom prst="rect">
+            <a:avLst/>
+          </a:prstGeom>
+          <a:noFill/>
+          <a:ln/>
+        </p:spPr>
+        <p:txBody>
+          <a:bodyPr wrap="square" lIns="0" tIns="0" rIns="0" bIns="0" rtlCol="0" anchor="t">
+            <a:normAutofit/>
+          </a:bodyPr>
+          <a:lstStyle/>
+          <a:p>
+            <a:pPr algn="l" indent="0" marL="0">
+              <a:lnSpc>
+                <a:spcPts val="1750"/>
+              </a:lnSpc>
+              <a:buNone/>
+            </a:pPr>
+            <a:r>
+              <a:rPr lang="en-US" sz="1250" dirty="0">
                 <a:solidFill>
                   <a:srgbClr val="46536B"/>
                 </a:solidFill>
@@ -4657,9 +4957,9 @@
                 <a:ea typeface="IBM Plex Sans" pitchFamily="34" charset="-122"/>
                 <a:cs typeface="IBM Plex Sans" pitchFamily="34" charset="-120"/>
               </a:rPr>
-              <a:t>Una plataforma en Python toma las bases de información y entrega un resumen visual agregado; el equipo se enfoca en interpretar.</a:t>
-            </a:r>
-            <a:endParaRPr lang="en-US" sz="1300" dirty="0"/>
+              <a:t>Cargas las bases de clientes deteriorados y la plataforma entrega un resumen visual agregado — tú interpretas el hallazgo.</a:t>
+            </a:r>
+            <a:endParaRPr lang="en-US" sz="1250" dirty="0"/>
           </a:p>
         </p:txBody>
       </p:sp>
@@ -4671,12 +4971,83 @@
         </p:nvSpPr>
         <p:spPr>
           <a:xfrm>
-            <a:off x="866775" y="2431256"/>
-            <a:ext cx="2343150" cy="1621631"/>
+            <a:off x="815975" y="2012314"/>
+            <a:ext cx="10560050" cy="2965732"/>
           </a:xfrm>
           <a:prstGeom prst="roundRect">
             <a:avLst>
-              <a:gd name="adj" fmla="val 7636"/>
+              <a:gd name="adj" fmla="val 5032"/>
+            </a:avLst>
+          </a:prstGeom>
+          <a:solidFill>
+            <a:srgbClr val="F2F4F7"/>
+          </a:solidFill>
+          <a:ln w="6350">
+            <a:solidFill>
+              <a:srgbClr val="E3E6E4"/>
+            </a:solidFill>
+            <a:prstDash val="solid"/>
+          </a:ln>
+        </p:spPr>
+      </p:sp>
+      <p:sp>
+        <p:nvSpPr>
+          <p:cNvPr id="6" name="Text 4"/>
+          <p:cNvSpPr/>
+          <p:nvPr/>
+        </p:nvSpPr>
+        <p:spPr>
+          <a:xfrm>
+            <a:off x="1020516" y="2216857"/>
+            <a:ext cx="10455498" cy="238760"/>
+          </a:xfrm>
+          <a:prstGeom prst="rect">
+            <a:avLst/>
+          </a:prstGeom>
+          <a:noFill/>
+          <a:ln/>
+        </p:spPr>
+        <p:txBody>
+          <a:bodyPr wrap="square" lIns="0" tIns="0" rIns="0" bIns="0" rtlCol="0" anchor="t">
+            <a:normAutofit/>
+          </a:bodyPr>
+          <a:lstStyle/>
+          <a:p>
+            <a:pPr algn="l" indent="0" marL="0">
+              <a:lnSpc>
+                <a:spcPts val="1680"/>
+              </a:lnSpc>
+              <a:buNone/>
+            </a:pPr>
+            <a:r>
+              <a:rPr lang="en-US" sz="1200" b="1" dirty="0">
+                <a:solidFill>
+                  <a:srgbClr val="0B1E3D"/>
+                </a:solidFill>
+                <a:latin typeface="IBM Plex Sans" pitchFamily="34" charset="0"/>
+                <a:ea typeface="IBM Plex Sans" pitchFamily="34" charset="-122"/>
+                <a:cs typeface="IBM Plex Sans" pitchFamily="34" charset="-120"/>
+              </a:rPr>
+              <a:t>Archivos de entrada</a:t>
+            </a:r>
+            <a:endParaRPr lang="en-US" sz="1200" dirty="0"/>
+          </a:p>
+        </p:txBody>
+      </p:sp>
+      <p:sp>
+        <p:nvSpPr>
+          <p:cNvPr id="7" name="Shape 5"/>
+          <p:cNvSpPr/>
+          <p:nvPr/>
+        </p:nvSpPr>
+        <p:spPr>
+          <a:xfrm>
+            <a:off x="1023691" y="2509593"/>
+            <a:ext cx="2924951" cy="368441"/>
+          </a:xfrm>
+          <a:prstGeom prst="roundRect">
+            <a:avLst>
+              <a:gd name="adj" fmla="val 16373"/>
             </a:avLst>
           </a:prstGeom>
           <a:solidFill>
@@ -4690,31 +5061,9 @@
           </a:ln>
         </p:spPr>
       </p:sp>
-      <p:sp>
-        <p:nvSpPr>
-          <p:cNvPr id="6" name="Shape 4"/>
-          <p:cNvSpPr/>
-          <p:nvPr/>
-        </p:nvSpPr>
-        <p:spPr>
-          <a:xfrm>
-            <a:off x="1835150" y="2637631"/>
-            <a:ext cx="406400" cy="406400"/>
-          </a:xfrm>
-          <a:prstGeom prst="roundRect">
-            <a:avLst>
-              <a:gd name="adj" fmla="val 25000"/>
-            </a:avLst>
-          </a:prstGeom>
-          <a:solidFill>
-            <a:srgbClr val="0B1E3D"/>
-          </a:solidFill>
-          <a:ln/>
-        </p:spPr>
-      </p:sp>
       <p:pic>
         <p:nvPicPr>
-          <p:cNvPr id="7" name="Image 0" descr="Database">    </p:cNvPr>
+          <p:cNvPr id="8" name="Image 0" descr="Database">    </p:cNvPr>
           <p:cNvPicPr>
             <a:picLocks noChangeAspect="1"/>
           </p:cNvPicPr>
@@ -4727,8 +5076,8 @@
         </p:blipFill>
         <p:spPr>
           <a:xfrm>
-            <a:off x="1936750" y="2739231"/>
-            <a:ext cx="203200" cy="203200"/>
+            <a:off x="1152031" y="2604911"/>
+            <a:ext cx="177800" cy="177800"/>
           </a:xfrm>
           <a:prstGeom prst="rect">
             <a:avLst/>
@@ -4737,72 +5086,28 @@
       </p:pic>
       <p:sp>
         <p:nvSpPr>
-          <p:cNvPr id="8" name="Text 5"/>
-          <p:cNvSpPr/>
-          <p:nvPr/>
-        </p:nvSpPr>
-        <p:spPr>
-          <a:xfrm>
-            <a:off x="1479153" y="3132931"/>
-            <a:ext cx="1118394" cy="223441"/>
-          </a:xfrm>
-          <a:prstGeom prst="rect">
-            <a:avLst/>
-          </a:prstGeom>
-          <a:noFill/>
-          <a:ln/>
-        </p:spPr>
-        <p:txBody>
-          <a:bodyPr wrap="square" lIns="0" tIns="0" rIns="0" bIns="0" rtlCol="0" anchor="t">
-            <a:normAutofit/>
-          </a:bodyPr>
-          <a:lstStyle/>
-          <a:p>
-            <a:pPr algn="ctr" indent="0" marL="0">
-              <a:lnSpc>
-                <a:spcPts val="1560"/>
-              </a:lnSpc>
-              <a:buNone/>
-            </a:pPr>
-            <a:r>
-              <a:rPr lang="en-US" sz="1300" b="1" dirty="0">
-                <a:solidFill>
-                  <a:srgbClr val="0B1E3D"/>
-                </a:solidFill>
-                <a:latin typeface="IBM Plex Sans" pitchFamily="34" charset="0"/>
-                <a:ea typeface="IBM Plex Sans" pitchFamily="34" charset="-122"/>
-                <a:cs typeface="IBM Plex Sans" pitchFamily="34" charset="-120"/>
-              </a:rPr>
-              <a:t>Archivos base</a:t>
-            </a:r>
-            <a:endParaRPr lang="en-US" sz="1300" dirty="0"/>
-          </a:p>
-        </p:txBody>
-      </p:sp>
-      <p:sp>
-        <p:nvSpPr>
           <p:cNvPr id="9" name="Text 6"/>
           <p:cNvSpPr/>
           <p:nvPr/>
         </p:nvSpPr>
         <p:spPr>
           <a:xfrm>
-            <a:off x="1044194" y="3419872"/>
-            <a:ext cx="1988312" cy="452041"/>
-          </a:xfrm>
-          <a:prstGeom prst="rect">
-            <a:avLst/>
-          </a:prstGeom>
-          <a:noFill/>
-          <a:ln/>
-        </p:spPr>
-        <p:txBody>
-          <a:bodyPr wrap="square" lIns="0" tIns="0" rIns="0" bIns="0" rtlCol="0" anchor="t">
-            <a:normAutofit/>
-          </a:bodyPr>
-          <a:lstStyle/>
-          <a:p>
-            <a:pPr algn="ctr" indent="0" marL="0">
+            <a:off x="1393331" y="2587132"/>
+            <a:ext cx="2499779" cy="238760"/>
+          </a:xfrm>
+          <a:prstGeom prst="rect">
+            <a:avLst/>
+          </a:prstGeom>
+          <a:noFill/>
+          <a:ln/>
+        </p:spPr>
+        <p:txBody>
+          <a:bodyPr wrap="square" lIns="0" tIns="0" rIns="0" bIns="0" rtlCol="0" anchor="t">
+            <a:normAutofit/>
+          </a:bodyPr>
+          <a:lstStyle/>
+          <a:p>
+            <a:pPr algn="l" indent="0" marL="0">
               <a:lnSpc>
                 <a:spcPts val="1680"/>
               </a:lnSpc>
@@ -4817,49 +5122,26 @@
                 <a:ea typeface="IBM Plex Sans" pitchFamily="34" charset="-122"/>
                 <a:cs typeface="IBM Plex Sans" pitchFamily="34" charset="-120"/>
               </a:rPr>
-              <a:t>Bases de clientes con deterioro de perfil</a:t>
+              <a:t>clientes_deteriorados_ago2026.xlsx</a:t>
             </a:r>
             <a:endParaRPr lang="en-US" sz="1200" dirty="0"/>
           </a:p>
         </p:txBody>
       </p:sp>
-      <p:pic>
-        <p:nvPicPr>
-          <p:cNvPr id="10" name="Image 1" descr="arrow-right">    </p:cNvPr>
-          <p:cNvPicPr>
-            <a:picLocks noChangeAspect="1"/>
-          </p:cNvPicPr>
-          <p:nvPr/>
-        </p:nvPicPr>
-        <p:blipFill>
-          <a:blip r:embed="rId2"/>
-          <a:srcRect l="0" r="0" t="0" b="0"/>
-          <a:stretch/>
-        </p:blipFill>
-        <p:spPr>
-          <a:xfrm>
-            <a:off x="3213100" y="3172222"/>
-            <a:ext cx="355600" cy="139700"/>
-          </a:xfrm>
-          <a:prstGeom prst="rect">
-            <a:avLst/>
-          </a:prstGeom>
-        </p:spPr>
-      </p:pic>
-      <p:sp>
-        <p:nvSpPr>
-          <p:cNvPr id="11" name="Shape 7"/>
-          <p:cNvSpPr/>
-          <p:nvPr/>
-        </p:nvSpPr>
-        <p:spPr>
-          <a:xfrm>
-            <a:off x="3571875" y="2431256"/>
-            <a:ext cx="2343150" cy="1621631"/>
+      <p:sp>
+        <p:nvSpPr>
+          <p:cNvPr id="10" name="Shape 7"/>
+          <p:cNvSpPr/>
+          <p:nvPr/>
+        </p:nvSpPr>
+        <p:spPr>
+          <a:xfrm>
+            <a:off x="4031192" y="2509593"/>
+            <a:ext cx="1755140" cy="368441"/>
           </a:xfrm>
           <a:prstGeom prst="roundRect">
             <a:avLst>
-              <a:gd name="adj" fmla="val 7636"/>
+              <a:gd name="adj" fmla="val 16373"/>
             </a:avLst>
           </a:prstGeom>
           <a:solidFill>
@@ -4873,45 +5155,23 @@
           </a:ln>
         </p:spPr>
       </p:sp>
-      <p:sp>
-        <p:nvSpPr>
-          <p:cNvPr id="12" name="Shape 8"/>
-          <p:cNvSpPr/>
-          <p:nvPr/>
-        </p:nvSpPr>
-        <p:spPr>
-          <a:xfrm>
-            <a:off x="4540250" y="2637631"/>
-            <a:ext cx="406400" cy="406400"/>
-          </a:xfrm>
-          <a:prstGeom prst="roundRect">
-            <a:avLst>
-              <a:gd name="adj" fmla="val 25000"/>
-            </a:avLst>
-          </a:prstGeom>
-          <a:solidFill>
-            <a:srgbClr val="0B1E3D"/>
-          </a:solidFill>
-          <a:ln/>
-        </p:spPr>
-      </p:sp>
       <p:pic>
         <p:nvPicPr>
-          <p:cNvPr id="13" name="Image 2" descr="Settings">    </p:cNvPr>
+          <p:cNvPr id="11" name="Image 1" descr="Database">    </p:cNvPr>
           <p:cNvPicPr>
             <a:picLocks noChangeAspect="1"/>
           </p:cNvPicPr>
           <p:nvPr/>
         </p:nvPicPr>
         <p:blipFill>
-          <a:blip r:embed="rId3"/>
+          <a:blip r:embed="rId2"/>
           <a:srcRect l="0" r="0" t="0" b="0"/>
           <a:stretch/>
         </p:blipFill>
         <p:spPr>
           <a:xfrm>
-            <a:off x="4641850" y="2739231"/>
-            <a:ext cx="203200" cy="203200"/>
+            <a:off x="4159532" y="2604911"/>
+            <a:ext cx="177800" cy="177800"/>
           </a:xfrm>
           <a:prstGeom prst="rect">
             <a:avLst/>
@@ -4920,72 +5180,28 @@
       </p:pic>
       <p:sp>
         <p:nvSpPr>
-          <p:cNvPr id="14" name="Text 9"/>
-          <p:cNvSpPr/>
-          <p:nvPr/>
-        </p:nvSpPr>
-        <p:spPr>
-          <a:xfrm>
-            <a:off x="4144466" y="3132931"/>
-            <a:ext cx="1197868" cy="223441"/>
-          </a:xfrm>
-          <a:prstGeom prst="rect">
-            <a:avLst/>
-          </a:prstGeom>
-          <a:noFill/>
-          <a:ln/>
-        </p:spPr>
-        <p:txBody>
-          <a:bodyPr wrap="square" lIns="0" tIns="0" rIns="0" bIns="0" rtlCol="0" anchor="t">
-            <a:normAutofit/>
-          </a:bodyPr>
-          <a:lstStyle/>
-          <a:p>
-            <a:pPr algn="ctr" indent="0" marL="0">
-              <a:lnSpc>
-                <a:spcPts val="1560"/>
-              </a:lnSpc>
-              <a:buNone/>
-            </a:pPr>
-            <a:r>
-              <a:rPr lang="en-US" sz="1300" b="1" dirty="0">
-                <a:solidFill>
-                  <a:srgbClr val="0B1E3D"/>
-                </a:solidFill>
-                <a:latin typeface="IBM Plex Sans" pitchFamily="34" charset="0"/>
-                <a:ea typeface="IBM Plex Sans" pitchFamily="34" charset="-122"/>
-                <a:cs typeface="IBM Plex Sans" pitchFamily="34" charset="-120"/>
-              </a:rPr>
-              <a:t>Procesamiento</a:t>
-            </a:r>
-            <a:endParaRPr lang="en-US" sz="1300" dirty="0"/>
-          </a:p>
-        </p:txBody>
-      </p:sp>
-      <p:sp>
-        <p:nvSpPr>
-          <p:cNvPr id="15" name="Text 10"/>
-          <p:cNvSpPr/>
-          <p:nvPr/>
-        </p:nvSpPr>
-        <p:spPr>
-          <a:xfrm>
-            <a:off x="3749294" y="3419872"/>
-            <a:ext cx="1988312" cy="452041"/>
-          </a:xfrm>
-          <a:prstGeom prst="rect">
-            <a:avLst/>
-          </a:prstGeom>
-          <a:noFill/>
-          <a:ln/>
-        </p:spPr>
-        <p:txBody>
-          <a:bodyPr wrap="square" lIns="0" tIns="0" rIns="0" bIns="0" rtlCol="0" anchor="t">
-            <a:normAutofit/>
-          </a:bodyPr>
-          <a:lstStyle/>
-          <a:p>
-            <a:pPr algn="ctr" indent="0" marL="0">
+          <p:cNvPr id="12" name="Text 8"/>
+          <p:cNvSpPr/>
+          <p:nvPr/>
+        </p:nvSpPr>
+        <p:spPr>
+          <a:xfrm>
+            <a:off x="4400832" y="2587132"/>
+            <a:ext cx="1307959" cy="238760"/>
+          </a:xfrm>
+          <a:prstGeom prst="rect">
+            <a:avLst/>
+          </a:prstGeom>
+          <a:noFill/>
+          <a:ln/>
+        </p:spPr>
+        <p:txBody>
+          <a:bodyPr wrap="square" lIns="0" tIns="0" rIns="0" bIns="0" rtlCol="0" anchor="t">
+            <a:normAutofit/>
+          </a:bodyPr>
+          <a:lstStyle/>
+          <a:p>
+            <a:pPr algn="l" indent="0" marL="0">
               <a:lnSpc>
                 <a:spcPts val="1680"/>
               </a:lnSpc>
@@ -5000,49 +5216,26 @@
                 <a:ea typeface="IBM Plex Sans" pitchFamily="34" charset="-122"/>
                 <a:cs typeface="IBM Plex Sans" pitchFamily="34" charset="-120"/>
               </a:rPr>
-              <a:t>Python agrupa variables comunes al deterioro</a:t>
+              <a:t>variables_buro.csv</a:t>
             </a:r>
             <a:endParaRPr lang="en-US" sz="1200" dirty="0"/>
           </a:p>
         </p:txBody>
       </p:sp>
-      <p:pic>
-        <p:nvPicPr>
-          <p:cNvPr id="16" name="Image 3" descr="arrow-right">    </p:cNvPr>
-          <p:cNvPicPr>
-            <a:picLocks noChangeAspect="1"/>
-          </p:cNvPicPr>
-          <p:nvPr/>
-        </p:nvPicPr>
-        <p:blipFill>
-          <a:blip r:embed="rId4"/>
-          <a:srcRect l="0" r="0" t="0" b="0"/>
-          <a:stretch/>
-        </p:blipFill>
-        <p:spPr>
-          <a:xfrm>
-            <a:off x="5918200" y="3172222"/>
-            <a:ext cx="355600" cy="139700"/>
-          </a:xfrm>
-          <a:prstGeom prst="rect">
-            <a:avLst/>
-          </a:prstGeom>
-        </p:spPr>
-      </p:pic>
-      <p:sp>
-        <p:nvSpPr>
-          <p:cNvPr id="17" name="Shape 11"/>
-          <p:cNvSpPr/>
-          <p:nvPr/>
-        </p:nvSpPr>
-        <p:spPr>
-          <a:xfrm>
-            <a:off x="6276975" y="2431256"/>
-            <a:ext cx="2343150" cy="1621631"/>
+      <p:sp>
+        <p:nvSpPr>
+          <p:cNvPr id="13" name="Shape 9"/>
+          <p:cNvSpPr/>
+          <p:nvPr/>
+        </p:nvSpPr>
+        <p:spPr>
+          <a:xfrm>
+            <a:off x="5868882" y="2509593"/>
+            <a:ext cx="1724872" cy="368441"/>
           </a:xfrm>
           <a:prstGeom prst="roundRect">
             <a:avLst>
-              <a:gd name="adj" fmla="val 7636"/>
+              <a:gd name="adj" fmla="val 16373"/>
             </a:avLst>
           </a:prstGeom>
           <a:solidFill>
@@ -5056,20 +5249,264 @@
           </a:ln>
         </p:spPr>
       </p:sp>
-      <p:sp>
-        <p:nvSpPr>
-          <p:cNvPr id="18" name="Shape 12"/>
-          <p:cNvSpPr/>
-          <p:nvPr/>
-        </p:nvSpPr>
-        <p:spPr>
-          <a:xfrm>
-            <a:off x="7245350" y="2637631"/>
-            <a:ext cx="406400" cy="406400"/>
+      <p:pic>
+        <p:nvPicPr>
+          <p:cNvPr id="14" name="Image 2" descr="Database">    </p:cNvPr>
+          <p:cNvPicPr>
+            <a:picLocks noChangeAspect="1"/>
+          </p:cNvPicPr>
+          <p:nvPr/>
+        </p:nvPicPr>
+        <p:blipFill>
+          <a:blip r:embed="rId3"/>
+          <a:srcRect l="0" r="0" t="0" b="0"/>
+          <a:stretch/>
+        </p:blipFill>
+        <p:spPr>
+          <a:xfrm>
+            <a:off x="5997222" y="2604911"/>
+            <a:ext cx="177800" cy="177800"/>
+          </a:xfrm>
+          <a:prstGeom prst="rect">
+            <a:avLst/>
+          </a:prstGeom>
+        </p:spPr>
+      </p:pic>
+      <p:sp>
+        <p:nvSpPr>
+          <p:cNvPr id="15" name="Text 10"/>
+          <p:cNvSpPr/>
+          <p:nvPr/>
+        </p:nvSpPr>
+        <p:spPr>
+          <a:xfrm>
+            <a:off x="6238522" y="2587132"/>
+            <a:ext cx="1277691" cy="238760"/>
+          </a:xfrm>
+          <a:prstGeom prst="rect">
+            <a:avLst/>
+          </a:prstGeom>
+          <a:noFill/>
+          <a:ln/>
+        </p:spPr>
+        <p:txBody>
+          <a:bodyPr wrap="square" lIns="0" tIns="0" rIns="0" bIns="0" rtlCol="0" anchor="t">
+            <a:normAutofit/>
+          </a:bodyPr>
+          <a:lstStyle/>
+          <a:p>
+            <a:pPr algn="l" indent="0" marL="0">
+              <a:lnSpc>
+                <a:spcPts val="1680"/>
+              </a:lnSpc>
+              <a:buNone/>
+            </a:pPr>
+            <a:r>
+              <a:rPr lang="en-US" sz="1200" dirty="0">
+                <a:solidFill>
+                  <a:srgbClr val="46536B"/>
+                </a:solidFill>
+                <a:latin typeface="IBM Plex Sans" pitchFamily="34" charset="0"/>
+                <a:ea typeface="IBM Plex Sans" pitchFamily="34" charset="-122"/>
+                <a:cs typeface="IBM Plex Sans" pitchFamily="34" charset="-120"/>
+              </a:rPr>
+              <a:t>score_interno.xlsx</a:t>
+            </a:r>
+            <a:endParaRPr lang="en-US" sz="1200" dirty="0"/>
+          </a:p>
+        </p:txBody>
+      </p:sp>
+      <p:pic>
+        <p:nvPicPr>
+          <p:cNvPr id="16" name="Image 3" descr="arrow-down">    </p:cNvPr>
+          <p:cNvPicPr>
+            <a:picLocks noChangeAspect="1"/>
+          </p:cNvPicPr>
+          <p:nvPr/>
+        </p:nvPicPr>
+        <p:blipFill>
+          <a:blip r:embed="rId4"/>
+          <a:srcRect l="0" r="0" t="0" b="0"/>
+          <a:stretch/>
+        </p:blipFill>
+        <p:spPr>
+          <a:xfrm>
+            <a:off x="4146162" y="3008207"/>
+            <a:ext cx="139700" cy="254000"/>
+          </a:xfrm>
+          <a:prstGeom prst="rect">
+            <a:avLst/>
+          </a:prstGeom>
+        </p:spPr>
+      </p:pic>
+      <p:sp>
+        <p:nvSpPr>
+          <p:cNvPr id="17" name="Text 11"/>
+          <p:cNvSpPr/>
+          <p:nvPr/>
+        </p:nvSpPr>
+        <p:spPr>
+          <a:xfrm>
+            <a:off x="4387462" y="3028528"/>
+            <a:ext cx="3768091" cy="238760"/>
+          </a:xfrm>
+          <a:prstGeom prst="rect">
+            <a:avLst/>
+          </a:prstGeom>
+          <a:noFill/>
+          <a:ln/>
+        </p:spPr>
+        <p:txBody>
+          <a:bodyPr wrap="square" lIns="0" tIns="0" rIns="0" bIns="0" rtlCol="0" anchor="t">
+            <a:normAutofit/>
+          </a:bodyPr>
+          <a:lstStyle/>
+          <a:p>
+            <a:pPr algn="l" indent="0" marL="0">
+              <a:lnSpc>
+                <a:spcPts val="1680"/>
+              </a:lnSpc>
+              <a:buNone/>
+            </a:pPr>
+            <a:r>
+              <a:rPr lang="en-US" sz="1200" b="1" dirty="0">
+                <a:solidFill>
+                  <a:srgbClr val="0B1E3D"/>
+                </a:solidFill>
+                <a:latin typeface="IBM Plex Sans" pitchFamily="34" charset="0"/>
+                <a:ea typeface="IBM Plex Sans" pitchFamily="34" charset="-122"/>
+                <a:cs typeface="IBM Plex Sans" pitchFamily="34" charset="-120"/>
+              </a:rPr>
+              <a:t>La IA agrupa las variables más comunes del deterioro</a:t>
+            </a:r>
+            <a:endParaRPr lang="en-US" sz="1200" dirty="0"/>
+          </a:p>
+        </p:txBody>
+      </p:sp>
+      <p:sp>
+        <p:nvSpPr>
+          <p:cNvPr id="18" name="Text 12"/>
+          <p:cNvSpPr/>
+          <p:nvPr/>
+        </p:nvSpPr>
+        <p:spPr>
+          <a:xfrm>
+            <a:off x="1020516" y="3389207"/>
+            <a:ext cx="10455498" cy="238760"/>
+          </a:xfrm>
+          <a:prstGeom prst="rect">
+            <a:avLst/>
+          </a:prstGeom>
+          <a:noFill/>
+          <a:ln/>
+        </p:spPr>
+        <p:txBody>
+          <a:bodyPr wrap="square" lIns="0" tIns="0" rIns="0" bIns="0" rtlCol="0" anchor="t">
+            <a:normAutofit/>
+          </a:bodyPr>
+          <a:lstStyle/>
+          <a:p>
+            <a:pPr algn="l" indent="0" marL="0">
+              <a:lnSpc>
+                <a:spcPts val="1680"/>
+              </a:lnSpc>
+              <a:buNone/>
+            </a:pPr>
+            <a:r>
+              <a:rPr lang="en-US" sz="1200" b="1" dirty="0">
+                <a:solidFill>
+                  <a:srgbClr val="0B1E3D"/>
+                </a:solidFill>
+                <a:latin typeface="IBM Plex Sans" pitchFamily="34" charset="0"/>
+                <a:ea typeface="IBM Plex Sans" pitchFamily="34" charset="-122"/>
+                <a:cs typeface="IBM Plex Sans" pitchFamily="34" charset="-120"/>
+              </a:rPr>
+              <a:t>Resumen agregado — variables más frecuentes</a:t>
+            </a:r>
+            <a:endParaRPr lang="en-US" sz="1200" dirty="0"/>
+          </a:p>
+        </p:txBody>
+      </p:sp>
+      <p:sp>
+        <p:nvSpPr>
+          <p:cNvPr id="19" name="Text 13"/>
+          <p:cNvSpPr/>
+          <p:nvPr/>
+        </p:nvSpPr>
+        <p:spPr>
+          <a:xfrm>
+            <a:off x="1020516" y="3691468"/>
+            <a:ext cx="2747010" cy="238760"/>
+          </a:xfrm>
+          <a:prstGeom prst="rect">
+            <a:avLst/>
+          </a:prstGeom>
+          <a:noFill/>
+          <a:ln/>
+        </p:spPr>
+        <p:txBody>
+          <a:bodyPr wrap="square" lIns="0" tIns="0" rIns="0" bIns="0" rtlCol="0" anchor="t">
+            <a:normAutofit/>
+          </a:bodyPr>
+          <a:lstStyle/>
+          <a:p>
+            <a:pPr algn="l" indent="0" marL="0">
+              <a:lnSpc>
+                <a:spcPts val="1680"/>
+              </a:lnSpc>
+              <a:buNone/>
+            </a:pPr>
+            <a:r>
+              <a:rPr lang="en-US" sz="1200" dirty="0">
+                <a:solidFill>
+                  <a:srgbClr val="46536B"/>
+                </a:solidFill>
+                <a:latin typeface="IBM Plex Sans" pitchFamily="34" charset="0"/>
+                <a:ea typeface="IBM Plex Sans" pitchFamily="34" charset="-122"/>
+                <a:cs typeface="IBM Plex Sans" pitchFamily="34" charset="-120"/>
+              </a:rPr>
+              <a:t>Vive con familiares</a:t>
+            </a:r>
+            <a:endParaRPr lang="en-US" sz="1200" dirty="0"/>
+          </a:p>
+        </p:txBody>
+      </p:sp>
+      <p:sp>
+        <p:nvSpPr>
+          <p:cNvPr id="20" name="Shape 14"/>
+          <p:cNvSpPr/>
+          <p:nvPr/>
+        </p:nvSpPr>
+        <p:spPr>
+          <a:xfrm>
+            <a:off x="3789116" y="3691468"/>
+            <a:ext cx="5080000" cy="152400"/>
           </a:xfrm>
           <a:prstGeom prst="roundRect">
             <a:avLst>
-              <a:gd name="adj" fmla="val 25000"/>
+              <a:gd name="adj" fmla="val 33333"/>
+            </a:avLst>
+          </a:prstGeom>
+          <a:solidFill>
+            <a:srgbClr val="E3E6E4"/>
+          </a:solidFill>
+          <a:ln/>
+        </p:spPr>
+      </p:sp>
+      <p:sp>
+        <p:nvSpPr>
+          <p:cNvPr id="21" name="Shape 15"/>
+          <p:cNvSpPr/>
+          <p:nvPr/>
+        </p:nvSpPr>
+        <p:spPr>
+          <a:xfrm>
+            <a:off x="3789116" y="3691468"/>
+            <a:ext cx="3098800" cy="152400"/>
+          </a:xfrm>
+          <a:prstGeom prst="roundRect">
+            <a:avLst>
+              <a:gd name="adj" fmla="val 33333"/>
             </a:avLst>
           </a:prstGeom>
           <a:solidFill>
@@ -5078,60 +5515,37 @@
           <a:ln/>
         </p:spPr>
       </p:sp>
-      <p:pic>
-        <p:nvPicPr>
-          <p:cNvPr id="19" name="Image 4" descr="Chart">    </p:cNvPr>
-          <p:cNvPicPr>
-            <a:picLocks noChangeAspect="1"/>
-          </p:cNvPicPr>
-          <p:nvPr/>
-        </p:nvPicPr>
-        <p:blipFill>
-          <a:blip r:embed="rId5"/>
-          <a:srcRect l="0" r="0" t="0" b="0"/>
-          <a:stretch/>
-        </p:blipFill>
-        <p:spPr>
-          <a:xfrm>
-            <a:off x="7346950" y="2739231"/>
-            <a:ext cx="203200" cy="203200"/>
-          </a:xfrm>
-          <a:prstGeom prst="rect">
-            <a:avLst/>
-          </a:prstGeom>
-        </p:spPr>
-      </p:pic>
-      <p:sp>
-        <p:nvSpPr>
-          <p:cNvPr id="20" name="Text 13"/>
-          <p:cNvSpPr/>
-          <p:nvPr/>
-        </p:nvSpPr>
-        <p:spPr>
-          <a:xfrm>
-            <a:off x="6540853" y="3132931"/>
-            <a:ext cx="1815295" cy="223441"/>
-          </a:xfrm>
-          <a:prstGeom prst="rect">
-            <a:avLst/>
-          </a:prstGeom>
-          <a:noFill/>
-          <a:ln/>
-        </p:spPr>
-        <p:txBody>
-          <a:bodyPr wrap="square" lIns="0" tIns="0" rIns="0" bIns="0" rtlCol="0" anchor="t">
-            <a:normAutofit/>
-          </a:bodyPr>
-          <a:lstStyle/>
-          <a:p>
-            <a:pPr algn="ctr" indent="0" marL="0">
-              <a:lnSpc>
-                <a:spcPts val="1560"/>
-              </a:lnSpc>
-              <a:buNone/>
-            </a:pPr>
-            <a:r>
-              <a:rPr lang="en-US" sz="1300" b="1" dirty="0">
+      <p:sp>
+        <p:nvSpPr>
+          <p:cNvPr id="22" name="Text 16"/>
+          <p:cNvSpPr/>
+          <p:nvPr/>
+        </p:nvSpPr>
+        <p:spPr>
+          <a:xfrm>
+            <a:off x="8919916" y="3691468"/>
+            <a:ext cx="558800" cy="238760"/>
+          </a:xfrm>
+          <a:prstGeom prst="rect">
+            <a:avLst/>
+          </a:prstGeom>
+          <a:noFill/>
+          <a:ln/>
+        </p:spPr>
+        <p:txBody>
+          <a:bodyPr wrap="square" lIns="0" tIns="0" rIns="0" bIns="0" rtlCol="0" anchor="t">
+            <a:normAutofit/>
+          </a:bodyPr>
+          <a:lstStyle/>
+          <a:p>
+            <a:pPr algn="r" indent="0" marL="0">
+              <a:lnSpc>
+                <a:spcPts val="1680"/>
+              </a:lnSpc>
+              <a:buNone/>
+            </a:pPr>
+            <a:r>
+              <a:rPr lang="en-US" sz="1200" b="1" dirty="0">
                 <a:solidFill>
                   <a:srgbClr val="0B1E3D"/>
                 </a:solidFill>
@@ -5139,36 +5553,36 @@
                 <a:ea typeface="IBM Plex Sans" pitchFamily="34" charset="-122"/>
                 <a:cs typeface="IBM Plex Sans" pitchFamily="34" charset="-120"/>
               </a:rPr>
-              <a:t>Visualización agregada</a:t>
-            </a:r>
-            <a:endParaRPr lang="en-US" sz="1300" dirty="0"/>
-          </a:p>
-        </p:txBody>
-      </p:sp>
-      <p:sp>
-        <p:nvSpPr>
-          <p:cNvPr id="21" name="Text 14"/>
-          <p:cNvSpPr/>
-          <p:nvPr/>
-        </p:nvSpPr>
-        <p:spPr>
-          <a:xfrm>
-            <a:off x="6454394" y="3419872"/>
-            <a:ext cx="1988312" cy="452041"/>
-          </a:xfrm>
-          <a:prstGeom prst="rect">
-            <a:avLst/>
-          </a:prstGeom>
-          <a:noFill/>
-          <a:ln/>
-        </p:spPr>
-        <p:txBody>
-          <a:bodyPr wrap="square" lIns="0" tIns="0" rIns="0" bIns="0" rtlCol="0" anchor="t">
-            <a:normAutofit/>
-          </a:bodyPr>
-          <a:lstStyle/>
-          <a:p>
-            <a:pPr algn="ctr" indent="0" marL="0">
+              <a:t>61%</a:t>
+            </a:r>
+            <a:endParaRPr lang="en-US" sz="1200" dirty="0"/>
+          </a:p>
+        </p:txBody>
+      </p:sp>
+      <p:sp>
+        <p:nvSpPr>
+          <p:cNvPr id="23" name="Text 17"/>
+          <p:cNvSpPr/>
+          <p:nvPr/>
+        </p:nvSpPr>
+        <p:spPr>
+          <a:xfrm>
+            <a:off x="1020516" y="3981028"/>
+            <a:ext cx="2747010" cy="238760"/>
+          </a:xfrm>
+          <a:prstGeom prst="rect">
+            <a:avLst/>
+          </a:prstGeom>
+          <a:noFill/>
+          <a:ln/>
+        </p:spPr>
+        <p:txBody>
+          <a:bodyPr wrap="square" lIns="0" tIns="0" rIns="0" bIns="0" rtlCol="0" anchor="t">
+            <a:normAutofit/>
+          </a:bodyPr>
+          <a:lstStyle/>
+          <a:p>
+            <a:pPr algn="l" indent="0" marL="0">
               <a:lnSpc>
                 <a:spcPts val="1680"/>
               </a:lnSpc>
@@ -5183,76 +5597,48 @@
                 <a:ea typeface="IBM Plex Sans" pitchFamily="34" charset="-122"/>
                 <a:cs typeface="IBM Plex Sans" pitchFamily="34" charset="-120"/>
               </a:rPr>
-              <a:t>Patrones del grupo, no expedientes uno a uno</a:t>
+              <a:t>Mora reciente en otro comercio</a:t>
             </a:r>
             <a:endParaRPr lang="en-US" sz="1200" dirty="0"/>
           </a:p>
         </p:txBody>
       </p:sp>
-      <p:pic>
-        <p:nvPicPr>
-          <p:cNvPr id="22" name="Image 5" descr="arrow-right">    </p:cNvPr>
-          <p:cNvPicPr>
-            <a:picLocks noChangeAspect="1"/>
-          </p:cNvPicPr>
-          <p:nvPr/>
-        </p:nvPicPr>
-        <p:blipFill>
-          <a:blip r:embed="rId6"/>
-          <a:srcRect l="0" r="0" t="0" b="0"/>
-          <a:stretch/>
-        </p:blipFill>
-        <p:spPr>
-          <a:xfrm>
-            <a:off x="8623300" y="3172222"/>
-            <a:ext cx="355600" cy="139700"/>
-          </a:xfrm>
-          <a:prstGeom prst="rect">
-            <a:avLst/>
-          </a:prstGeom>
-        </p:spPr>
-      </p:pic>
-      <p:sp>
-        <p:nvSpPr>
-          <p:cNvPr id="23" name="Shape 15"/>
-          <p:cNvSpPr/>
-          <p:nvPr/>
-        </p:nvSpPr>
-        <p:spPr>
-          <a:xfrm>
-            <a:off x="8982075" y="2431256"/>
-            <a:ext cx="2343150" cy="1621631"/>
+      <p:sp>
+        <p:nvSpPr>
+          <p:cNvPr id="24" name="Shape 18"/>
+          <p:cNvSpPr/>
+          <p:nvPr/>
+        </p:nvSpPr>
+        <p:spPr>
+          <a:xfrm>
+            <a:off x="3789116" y="3981028"/>
+            <a:ext cx="5080000" cy="152400"/>
           </a:xfrm>
           <a:prstGeom prst="roundRect">
             <a:avLst>
-              <a:gd name="adj" fmla="val 7636"/>
+              <a:gd name="adj" fmla="val 33333"/>
             </a:avLst>
           </a:prstGeom>
           <a:solidFill>
-            <a:srgbClr val="FFFFFF"/>
+            <a:srgbClr val="E3E6E4"/>
           </a:solidFill>
-          <a:ln w="6350">
-            <a:solidFill>
-              <a:srgbClr val="E3E6E4"/>
-            </a:solidFill>
-            <a:prstDash val="solid"/>
-          </a:ln>
-        </p:spPr>
-      </p:sp>
-      <p:sp>
-        <p:nvSpPr>
-          <p:cNvPr id="24" name="Shape 16"/>
-          <p:cNvSpPr/>
-          <p:nvPr/>
-        </p:nvSpPr>
-        <p:spPr>
-          <a:xfrm>
-            <a:off x="9950450" y="2637631"/>
-            <a:ext cx="406400" cy="406400"/>
+          <a:ln/>
+        </p:spPr>
+      </p:sp>
+      <p:sp>
+        <p:nvSpPr>
+          <p:cNvPr id="25" name="Shape 19"/>
+          <p:cNvSpPr/>
+          <p:nvPr/>
+        </p:nvSpPr>
+        <p:spPr>
+          <a:xfrm>
+            <a:off x="3789116" y="3981028"/>
+            <a:ext cx="2438400" cy="152400"/>
           </a:xfrm>
           <a:prstGeom prst="roundRect">
             <a:avLst>
-              <a:gd name="adj" fmla="val 25000"/>
+              <a:gd name="adj" fmla="val 33333"/>
             </a:avLst>
           </a:prstGeom>
           <a:solidFill>
@@ -5261,60 +5647,37 @@
           <a:ln/>
         </p:spPr>
       </p:sp>
-      <p:pic>
-        <p:nvPicPr>
-          <p:cNvPr id="25" name="Image 6" descr="Users">    </p:cNvPr>
-          <p:cNvPicPr>
-            <a:picLocks noChangeAspect="1"/>
-          </p:cNvPicPr>
-          <p:nvPr/>
-        </p:nvPicPr>
-        <p:blipFill>
-          <a:blip r:embed="rId7"/>
-          <a:srcRect l="0" r="0" t="0" b="0"/>
-          <a:stretch/>
-        </p:blipFill>
-        <p:spPr>
-          <a:xfrm>
-            <a:off x="10052050" y="2739231"/>
-            <a:ext cx="203200" cy="203200"/>
-          </a:xfrm>
-          <a:prstGeom prst="rect">
-            <a:avLst/>
-          </a:prstGeom>
-        </p:spPr>
-      </p:pic>
-      <p:sp>
-        <p:nvSpPr>
-          <p:cNvPr id="26" name="Text 17"/>
-          <p:cNvSpPr/>
-          <p:nvPr/>
-        </p:nvSpPr>
-        <p:spPr>
-          <a:xfrm>
-            <a:off x="9571038" y="3132931"/>
-            <a:ext cx="1165225" cy="223441"/>
-          </a:xfrm>
-          <a:prstGeom prst="rect">
-            <a:avLst/>
-          </a:prstGeom>
-          <a:noFill/>
-          <a:ln/>
-        </p:spPr>
-        <p:txBody>
-          <a:bodyPr wrap="square" lIns="0" tIns="0" rIns="0" bIns="0" rtlCol="0" anchor="t">
-            <a:normAutofit/>
-          </a:bodyPr>
-          <a:lstStyle/>
-          <a:p>
-            <a:pPr algn="ctr" indent="0" marL="0">
-              <a:lnSpc>
-                <a:spcPts val="1560"/>
-              </a:lnSpc>
-              <a:buNone/>
-            </a:pPr>
-            <a:r>
-              <a:rPr lang="en-US" sz="1300" b="1" dirty="0">
+      <p:sp>
+        <p:nvSpPr>
+          <p:cNvPr id="26" name="Text 20"/>
+          <p:cNvSpPr/>
+          <p:nvPr/>
+        </p:nvSpPr>
+        <p:spPr>
+          <a:xfrm>
+            <a:off x="8919916" y="3981028"/>
+            <a:ext cx="558800" cy="238760"/>
+          </a:xfrm>
+          <a:prstGeom prst="rect">
+            <a:avLst/>
+          </a:prstGeom>
+          <a:noFill/>
+          <a:ln/>
+        </p:spPr>
+        <p:txBody>
+          <a:bodyPr wrap="square" lIns="0" tIns="0" rIns="0" bIns="0" rtlCol="0" anchor="t">
+            <a:normAutofit/>
+          </a:bodyPr>
+          <a:lstStyle/>
+          <a:p>
+            <a:pPr algn="r" indent="0" marL="0">
+              <a:lnSpc>
+                <a:spcPts val="1680"/>
+              </a:lnSpc>
+              <a:buNone/>
+            </a:pPr>
+            <a:r>
+              <a:rPr lang="en-US" sz="1200" b="1" dirty="0">
                 <a:solidFill>
                   <a:srgbClr val="0B1E3D"/>
                 </a:solidFill>
@@ -5322,36 +5685,36 @@
                 <a:ea typeface="IBM Plex Sans" pitchFamily="34" charset="-122"/>
                 <a:cs typeface="IBM Plex Sans" pitchFamily="34" charset="-120"/>
               </a:rPr>
-              <a:t>Interpretación</a:t>
-            </a:r>
-            <a:endParaRPr lang="en-US" sz="1300" dirty="0"/>
-          </a:p>
-        </p:txBody>
-      </p:sp>
-      <p:sp>
-        <p:nvSpPr>
-          <p:cNvPr id="27" name="Text 18"/>
-          <p:cNvSpPr/>
-          <p:nvPr/>
-        </p:nvSpPr>
-        <p:spPr>
-          <a:xfrm>
-            <a:off x="9159494" y="3419872"/>
-            <a:ext cx="1988312" cy="452041"/>
-          </a:xfrm>
-          <a:prstGeom prst="rect">
-            <a:avLst/>
-          </a:prstGeom>
-          <a:noFill/>
-          <a:ln/>
-        </p:spPr>
-        <p:txBody>
-          <a:bodyPr wrap="square" lIns="0" tIns="0" rIns="0" bIns="0" rtlCol="0" anchor="t">
-            <a:normAutofit/>
-          </a:bodyPr>
-          <a:lstStyle/>
-          <a:p>
-            <a:pPr algn="ctr" indent="0" marL="0">
+              <a:t>48%</a:t>
+            </a:r>
+            <a:endParaRPr lang="en-US" sz="1200" dirty="0"/>
+          </a:p>
+        </p:txBody>
+      </p:sp>
+      <p:sp>
+        <p:nvSpPr>
+          <p:cNvPr id="27" name="Text 21"/>
+          <p:cNvSpPr/>
+          <p:nvPr/>
+        </p:nvSpPr>
+        <p:spPr>
+          <a:xfrm>
+            <a:off x="1020516" y="4270589"/>
+            <a:ext cx="2747010" cy="238760"/>
+          </a:xfrm>
+          <a:prstGeom prst="rect">
+            <a:avLst/>
+          </a:prstGeom>
+          <a:noFill/>
+          <a:ln/>
+        </p:spPr>
+        <p:txBody>
+          <a:bodyPr wrap="square" lIns="0" tIns="0" rIns="0" bIns="0" rtlCol="0" anchor="t">
+            <a:normAutofit/>
+          </a:bodyPr>
+          <a:lstStyle/>
+          <a:p>
+            <a:pPr algn="l" indent="0" marL="0">
               <a:lnSpc>
                 <a:spcPts val="1680"/>
               </a:lnSpc>
@@ -5366,7 +5729,7 @@
                 <a:ea typeface="IBM Plex Sans" pitchFamily="34" charset="-122"/>
                 <a:cs typeface="IBM Plex Sans" pitchFamily="34" charset="-120"/>
               </a:rPr>
-              <a:t>El equipo concluye y redacta el hallazgo</a:t>
+              <a:t>Saldo bajo en cuentas del pasivo</a:t>
             </a:r>
             <a:endParaRPr lang="en-US" sz="1200" dirty="0"/>
           </a:p>
@@ -5374,34 +5737,254 @@
       </p:sp>
       <p:sp>
         <p:nvSpPr>
-          <p:cNvPr id="28" name="Text 19"/>
-          <p:cNvSpPr/>
-          <p:nvPr/>
-        </p:nvSpPr>
-        <p:spPr>
-          <a:xfrm>
-            <a:off x="654304" y="4310063"/>
-            <a:ext cx="10883392" cy="238720"/>
-          </a:xfrm>
-          <a:prstGeom prst="rect">
-            <a:avLst/>
-          </a:prstGeom>
-          <a:noFill/>
-          <a:ln/>
-        </p:spPr>
-        <p:txBody>
-          <a:bodyPr wrap="square" lIns="0" tIns="0" rIns="0" bIns="0" rtlCol="0" anchor="t">
-            <a:normAutofit/>
-          </a:bodyPr>
-          <a:lstStyle/>
-          <a:p>
-            <a:pPr algn="ctr" indent="0" marL="0">
+          <p:cNvPr id="28" name="Shape 22"/>
+          <p:cNvSpPr/>
+          <p:nvPr/>
+        </p:nvSpPr>
+        <p:spPr>
+          <a:xfrm>
+            <a:off x="3789116" y="4270589"/>
+            <a:ext cx="5080000" cy="152400"/>
+          </a:xfrm>
+          <a:prstGeom prst="roundRect">
+            <a:avLst>
+              <a:gd name="adj" fmla="val 33333"/>
+            </a:avLst>
+          </a:prstGeom>
+          <a:solidFill>
+            <a:srgbClr val="E3E6E4"/>
+          </a:solidFill>
+          <a:ln/>
+        </p:spPr>
+      </p:sp>
+      <p:sp>
+        <p:nvSpPr>
+          <p:cNvPr id="29" name="Shape 23"/>
+          <p:cNvSpPr/>
+          <p:nvPr/>
+        </p:nvSpPr>
+        <p:spPr>
+          <a:xfrm>
+            <a:off x="3789116" y="4270589"/>
+            <a:ext cx="1981200" cy="152400"/>
+          </a:xfrm>
+          <a:prstGeom prst="roundRect">
+            <a:avLst>
+              <a:gd name="adj" fmla="val 33333"/>
+            </a:avLst>
+          </a:prstGeom>
+          <a:solidFill>
+            <a:srgbClr val="0B1E3D"/>
+          </a:solidFill>
+          <a:ln/>
+        </p:spPr>
+      </p:sp>
+      <p:sp>
+        <p:nvSpPr>
+          <p:cNvPr id="30" name="Text 24"/>
+          <p:cNvSpPr/>
+          <p:nvPr/>
+        </p:nvSpPr>
+        <p:spPr>
+          <a:xfrm>
+            <a:off x="8919916" y="4270589"/>
+            <a:ext cx="558800" cy="238760"/>
+          </a:xfrm>
+          <a:prstGeom prst="rect">
+            <a:avLst/>
+          </a:prstGeom>
+          <a:noFill/>
+          <a:ln/>
+        </p:spPr>
+        <p:txBody>
+          <a:bodyPr wrap="square" lIns="0" tIns="0" rIns="0" bIns="0" rtlCol="0" anchor="t">
+            <a:normAutofit/>
+          </a:bodyPr>
+          <a:lstStyle/>
+          <a:p>
+            <a:pPr algn="r" indent="0" marL="0">
               <a:lnSpc>
                 <a:spcPts val="1680"/>
               </a:lnSpc>
               <a:buNone/>
             </a:pPr>
             <a:r>
+              <a:rPr lang="en-US" sz="1200" b="1" dirty="0">
+                <a:solidFill>
+                  <a:srgbClr val="0B1E3D"/>
+                </a:solidFill>
+                <a:latin typeface="IBM Plex Sans" pitchFamily="34" charset="0"/>
+                <a:ea typeface="IBM Plex Sans" pitchFamily="34" charset="-122"/>
+                <a:cs typeface="IBM Plex Sans" pitchFamily="34" charset="-120"/>
+              </a:rPr>
+              <a:t>39%</a:t>
+            </a:r>
+            <a:endParaRPr lang="en-US" sz="1200" dirty="0"/>
+          </a:p>
+        </p:txBody>
+      </p:sp>
+      <p:sp>
+        <p:nvSpPr>
+          <p:cNvPr id="31" name="Text 25"/>
+          <p:cNvSpPr/>
+          <p:nvPr/>
+        </p:nvSpPr>
+        <p:spPr>
+          <a:xfrm>
+            <a:off x="1020516" y="4560146"/>
+            <a:ext cx="2747010" cy="238760"/>
+          </a:xfrm>
+          <a:prstGeom prst="rect">
+            <a:avLst/>
+          </a:prstGeom>
+          <a:noFill/>
+          <a:ln/>
+        </p:spPr>
+        <p:txBody>
+          <a:bodyPr wrap="square" lIns="0" tIns="0" rIns="0" bIns="0" rtlCol="0" anchor="t">
+            <a:normAutofit/>
+          </a:bodyPr>
+          <a:lstStyle/>
+          <a:p>
+            <a:pPr algn="l" indent="0" marL="0">
+              <a:lnSpc>
+                <a:spcPts val="1680"/>
+              </a:lnSpc>
+              <a:buNone/>
+            </a:pPr>
+            <a:r>
+              <a:rPr lang="en-US" sz="1200" dirty="0">
+                <a:solidFill>
+                  <a:srgbClr val="46536B"/>
+                </a:solidFill>
+                <a:latin typeface="IBM Plex Sans" pitchFamily="34" charset="0"/>
+                <a:ea typeface="IBM Plex Sans" pitchFamily="34" charset="-122"/>
+                <a:cs typeface="IBM Plex Sans" pitchFamily="34" charset="-120"/>
+              </a:rPr>
+              <a:t>Estado civil soltero</a:t>
+            </a:r>
+            <a:endParaRPr lang="en-US" sz="1200" dirty="0"/>
+          </a:p>
+        </p:txBody>
+      </p:sp>
+      <p:sp>
+        <p:nvSpPr>
+          <p:cNvPr id="32" name="Shape 26"/>
+          <p:cNvSpPr/>
+          <p:nvPr/>
+        </p:nvSpPr>
+        <p:spPr>
+          <a:xfrm>
+            <a:off x="3789116" y="4560146"/>
+            <a:ext cx="5080000" cy="152400"/>
+          </a:xfrm>
+          <a:prstGeom prst="roundRect">
+            <a:avLst>
+              <a:gd name="adj" fmla="val 33333"/>
+            </a:avLst>
+          </a:prstGeom>
+          <a:solidFill>
+            <a:srgbClr val="E3E6E4"/>
+          </a:solidFill>
+          <a:ln/>
+        </p:spPr>
+      </p:sp>
+      <p:sp>
+        <p:nvSpPr>
+          <p:cNvPr id="33" name="Shape 27"/>
+          <p:cNvSpPr/>
+          <p:nvPr/>
+        </p:nvSpPr>
+        <p:spPr>
+          <a:xfrm>
+            <a:off x="3789116" y="4560146"/>
+            <a:ext cx="1676400" cy="152400"/>
+          </a:xfrm>
+          <a:prstGeom prst="roundRect">
+            <a:avLst>
+              <a:gd name="adj" fmla="val 33333"/>
+            </a:avLst>
+          </a:prstGeom>
+          <a:solidFill>
+            <a:srgbClr val="0B1E3D"/>
+          </a:solidFill>
+          <a:ln/>
+        </p:spPr>
+      </p:sp>
+      <p:sp>
+        <p:nvSpPr>
+          <p:cNvPr id="34" name="Text 28"/>
+          <p:cNvSpPr/>
+          <p:nvPr/>
+        </p:nvSpPr>
+        <p:spPr>
+          <a:xfrm>
+            <a:off x="8919916" y="4560146"/>
+            <a:ext cx="558800" cy="238760"/>
+          </a:xfrm>
+          <a:prstGeom prst="rect">
+            <a:avLst/>
+          </a:prstGeom>
+          <a:noFill/>
+          <a:ln/>
+        </p:spPr>
+        <p:txBody>
+          <a:bodyPr wrap="square" lIns="0" tIns="0" rIns="0" bIns="0" rtlCol="0" anchor="t">
+            <a:normAutofit/>
+          </a:bodyPr>
+          <a:lstStyle/>
+          <a:p>
+            <a:pPr algn="r" indent="0" marL="0">
+              <a:lnSpc>
+                <a:spcPts val="1680"/>
+              </a:lnSpc>
+              <a:buNone/>
+            </a:pPr>
+            <a:r>
+              <a:rPr lang="en-US" sz="1200" b="1" dirty="0">
+                <a:solidFill>
+                  <a:srgbClr val="0B1E3D"/>
+                </a:solidFill>
+                <a:latin typeface="IBM Plex Sans" pitchFamily="34" charset="0"/>
+                <a:ea typeface="IBM Plex Sans" pitchFamily="34" charset="-122"/>
+                <a:cs typeface="IBM Plex Sans" pitchFamily="34" charset="-120"/>
+              </a:rPr>
+              <a:t>33%</a:t>
+            </a:r>
+            <a:endParaRPr lang="en-US" sz="1200" dirty="0"/>
+          </a:p>
+        </p:txBody>
+      </p:sp>
+      <p:sp>
+        <p:nvSpPr>
+          <p:cNvPr id="35" name="Text 29"/>
+          <p:cNvSpPr/>
+          <p:nvPr/>
+        </p:nvSpPr>
+        <p:spPr>
+          <a:xfrm>
+            <a:off x="812800" y="5108222"/>
+            <a:ext cx="10883392" cy="238760"/>
+          </a:xfrm>
+          <a:prstGeom prst="rect">
+            <a:avLst/>
+          </a:prstGeom>
+          <a:noFill/>
+          <a:ln/>
+        </p:spPr>
+        <p:txBody>
+          <a:bodyPr wrap="square" lIns="0" tIns="0" rIns="0" bIns="0" rtlCol="0" anchor="t">
+            <a:normAutofit/>
+          </a:bodyPr>
+          <a:lstStyle/>
+          <a:p>
+            <a:pPr algn="l" indent="0" marL="0">
+              <a:lnSpc>
+                <a:spcPts val="1680"/>
+              </a:lnSpc>
+              <a:buNone/>
+            </a:pPr>
+            <a:r>
               <a:rPr lang="en-US" sz="1200" i="1" dirty="0">
                 <a:solidFill>
                   <a:srgbClr val="8B98AC"/>
@@ -5410,7 +5993,7 @@
                 <a:ea typeface="IBM Plex Sans" pitchFamily="34" charset="-122"/>
                 <a:cs typeface="IBM Plex Sans" pitchFamily="34" charset="-120"/>
               </a:rPr>
-              <a:t>La plataforma organiza la información — el equipo decide qué significa.</a:t>
+              <a:t>Diseño y cifras ilustrativas — no corresponden a datos reales de clientes.</a:t>
             </a:r>
             <a:endParaRPr lang="en-US" sz="1200" dirty="0"/>
           </a:p>
@@ -5418,14 +6001,14 @@
       </p:sp>
       <p:sp>
         <p:nvSpPr>
-          <p:cNvPr id="29" name="Text 20"/>
-          <p:cNvSpPr/>
-          <p:nvPr/>
-        </p:nvSpPr>
-        <p:spPr>
-          <a:xfrm>
-            <a:off x="812800" y="6238280"/>
-            <a:ext cx="1684139" cy="238720"/>
+          <p:cNvPr id="36" name="Text 30"/>
+          <p:cNvSpPr/>
+          <p:nvPr/>
+        </p:nvSpPr>
+        <p:spPr>
+          <a:xfrm>
+            <a:off x="812800" y="6238239"/>
+            <a:ext cx="1695062" cy="238760"/>
           </a:xfrm>
           <a:prstGeom prst="rect">
             <a:avLst/>
@@ -5462,14 +6045,14 @@
       </p:sp>
       <p:sp>
         <p:nvSpPr>
-          <p:cNvPr id="30" name="Text 21"/>
-          <p:cNvSpPr/>
-          <p:nvPr/>
-        </p:nvSpPr>
-        <p:spPr>
-          <a:xfrm>
-            <a:off x="11065966" y="6238280"/>
-            <a:ext cx="364034" cy="238720"/>
+          <p:cNvPr id="37" name="Text 31"/>
+          <p:cNvSpPr/>
+          <p:nvPr/>
+        </p:nvSpPr>
+        <p:spPr>
+          <a:xfrm>
+            <a:off x="11069391" y="6238239"/>
+            <a:ext cx="360609" cy="238760"/>
           </a:xfrm>
           <a:prstGeom prst="rect">
             <a:avLst/>
@@ -5572,8 +6155,8 @@
         </p:nvSpPr>
         <p:spPr>
           <a:xfrm>
-            <a:off x="812800" y="1686620"/>
-            <a:ext cx="10883392" cy="238720"/>
+            <a:off x="812800" y="1686561"/>
+            <a:ext cx="10883392" cy="238760"/>
           </a:xfrm>
           <a:prstGeom prst="rect">
             <a:avLst/>
@@ -5616,8 +6199,8 @@
         </p:nvSpPr>
         <p:spPr>
           <a:xfrm>
-            <a:off x="812800" y="2204740"/>
-            <a:ext cx="10883392" cy="528241"/>
+            <a:off x="812800" y="2204721"/>
+            <a:ext cx="10883392" cy="528320"/>
           </a:xfrm>
           <a:prstGeom prst="rect">
             <a:avLst/>
@@ -5660,7 +6243,7 @@
         </p:nvSpPr>
         <p:spPr>
           <a:xfrm>
-            <a:off x="812800" y="3012380"/>
+            <a:off x="812800" y="3012439"/>
             <a:ext cx="355600" cy="355600"/>
           </a:xfrm>
           <a:prstGeom prst="roundRect">
@@ -5682,8 +6265,8 @@
         </p:nvSpPr>
         <p:spPr>
           <a:xfrm>
-            <a:off x="937220" y="3065760"/>
-            <a:ext cx="157559" cy="274241"/>
+            <a:off x="939588" y="3065782"/>
+            <a:ext cx="152823" cy="274320"/>
           </a:xfrm>
           <a:prstGeom prst="rect">
             <a:avLst/>
@@ -5726,8 +6309,8 @@
         </p:nvSpPr>
         <p:spPr>
           <a:xfrm>
-            <a:off x="1320800" y="3065760"/>
-            <a:ext cx="3958535" cy="274241"/>
+            <a:off x="1320800" y="3065782"/>
+            <a:ext cx="3940724" cy="274320"/>
           </a:xfrm>
           <a:prstGeom prst="rect">
             <a:avLst/>
@@ -5770,7 +6353,7 @@
         </p:nvSpPr>
         <p:spPr>
           <a:xfrm>
-            <a:off x="812800" y="3545780"/>
+            <a:off x="812800" y="3545839"/>
             <a:ext cx="355600" cy="355600"/>
           </a:xfrm>
           <a:prstGeom prst="roundRect">
@@ -5792,8 +6375,8 @@
         </p:nvSpPr>
         <p:spPr>
           <a:xfrm>
-            <a:off x="937220" y="3599160"/>
-            <a:ext cx="157559" cy="274241"/>
+            <a:off x="939588" y="3599182"/>
+            <a:ext cx="152823" cy="274320"/>
           </a:xfrm>
           <a:prstGeom prst="rect">
             <a:avLst/>
@@ -5836,8 +6419,8 @@
         </p:nvSpPr>
         <p:spPr>
           <a:xfrm>
-            <a:off x="1320800" y="3599160"/>
-            <a:ext cx="3972230" cy="274241"/>
+            <a:off x="1320800" y="3599182"/>
+            <a:ext cx="3926953" cy="274320"/>
           </a:xfrm>
           <a:prstGeom prst="rect">
             <a:avLst/>
@@ -5880,7 +6463,7 @@
         </p:nvSpPr>
         <p:spPr>
           <a:xfrm>
-            <a:off x="812800" y="4079180"/>
+            <a:off x="812800" y="4079239"/>
             <a:ext cx="355600" cy="355600"/>
           </a:xfrm>
           <a:prstGeom prst="roundRect">
@@ -5902,8 +6485,8 @@
         </p:nvSpPr>
         <p:spPr>
           <a:xfrm>
-            <a:off x="937220" y="4132560"/>
-            <a:ext cx="157559" cy="274241"/>
+            <a:off x="939588" y="4132582"/>
+            <a:ext cx="152823" cy="274320"/>
           </a:xfrm>
           <a:prstGeom prst="rect">
             <a:avLst/>
@@ -5946,8 +6529,8 @@
         </p:nvSpPr>
         <p:spPr>
           <a:xfrm>
-            <a:off x="1320800" y="4132560"/>
-            <a:ext cx="3811476" cy="274241"/>
+            <a:off x="1320800" y="4132582"/>
+            <a:ext cx="3777066" cy="274320"/>
           </a:xfrm>
           <a:prstGeom prst="rect">
             <a:avLst/>
@@ -5990,7 +6573,7 @@
         </p:nvSpPr>
         <p:spPr>
           <a:xfrm>
-            <a:off x="812800" y="4612580"/>
+            <a:off x="812800" y="4612642"/>
             <a:ext cx="355600" cy="355600"/>
           </a:xfrm>
           <a:prstGeom prst="roundRect">
@@ -6012,8 +6595,8 @@
         </p:nvSpPr>
         <p:spPr>
           <a:xfrm>
-            <a:off x="937220" y="4665960"/>
-            <a:ext cx="157559" cy="274241"/>
+            <a:off x="939588" y="4665982"/>
+            <a:ext cx="152823" cy="274320"/>
           </a:xfrm>
           <a:prstGeom prst="rect">
             <a:avLst/>
@@ -6056,8 +6639,8 @@
         </p:nvSpPr>
         <p:spPr>
           <a:xfrm>
-            <a:off x="1320800" y="4665960"/>
-            <a:ext cx="5277468" cy="274241"/>
+            <a:off x="1320800" y="4665982"/>
+            <a:ext cx="5212270" cy="274320"/>
           </a:xfrm>
           <a:prstGeom prst="rect">
             <a:avLst/>
@@ -6100,8 +6683,8 @@
         </p:nvSpPr>
         <p:spPr>
           <a:xfrm>
-            <a:off x="812800" y="6238280"/>
-            <a:ext cx="1684139" cy="238720"/>
+            <a:off x="812800" y="6238242"/>
+            <a:ext cx="1695062" cy="238760"/>
           </a:xfrm>
           <a:prstGeom prst="rect">
             <a:avLst/>
@@ -6144,8 +6727,8 @@
         </p:nvSpPr>
         <p:spPr>
           <a:xfrm>
-            <a:off x="11065966" y="6238280"/>
-            <a:ext cx="364034" cy="238720"/>
+            <a:off x="11069391" y="6238242"/>
+            <a:ext cx="360609" cy="238760"/>
           </a:xfrm>
           <a:prstGeom prst="rect">
             <a:avLst/>
